--- a/presentation.pptx
+++ b/presentation.pptx
@@ -5111,6 +5111,9 @@
   <p:clrMapOvr>
     <a:masterClrMapping/>
   </p:clrMapOvr>
+  <p:transition spd="slow">
+    <p:randomBar dir="vert"/>
+  </p:transition>
 </p:sld>
 </file>
 
@@ -5874,6 +5877,18 @@
   <p:clrMapOvr>
     <a:masterClrMapping/>
   </p:clrMapOvr>
+  <mc:AlternateContent xmlns:mc="http://schemas.openxmlformats.org/markup-compatibility/2006">
+    <mc:Choice xmlns:p14="http://schemas.microsoft.com/office/powerpoint/2010/main" Requires="p14">
+      <p:transition spd="med" p14:dur="700">
+        <p:fade/>
+      </p:transition>
+    </mc:Choice>
+    <mc:Fallback>
+      <p:transition spd="med">
+        <p:fade/>
+      </p:transition>
+    </mc:Fallback>
+  </mc:AlternateContent>
 </p:sld>
 </file>
 
@@ -8012,6 +8027,9 @@
   <p:clrMapOvr>
     <a:masterClrMapping/>
   </p:clrMapOvr>
+  <p:transition spd="slow">
+    <p:comb/>
+  </p:transition>
 </p:sld>
 </file>
 
@@ -9483,6 +9501,9 @@
   <p:clrMapOvr>
     <a:masterClrMapping/>
   </p:clrMapOvr>
+  <p:transition spd="slow">
+    <p:randomBar dir="vert"/>
+  </p:transition>
 </p:sld>
 </file>
 
@@ -13587,6 +13608,18 @@
   <p:clrMapOvr>
     <a:masterClrMapping/>
   </p:clrMapOvr>
+  <mc:AlternateContent xmlns:mc="http://schemas.openxmlformats.org/markup-compatibility/2006">
+    <mc:Choice xmlns:p14="http://schemas.microsoft.com/office/powerpoint/2010/main" Requires="p14">
+      <p:transition spd="med" p14:dur="700">
+        <p:fade/>
+      </p:transition>
+    </mc:Choice>
+    <mc:Fallback>
+      <p:transition spd="med">
+        <p:fade/>
+      </p:transition>
+    </mc:Fallback>
+  </mc:AlternateContent>
 </p:sld>
 </file>
 
@@ -14932,6 +14965,18 @@
   <p:clrMapOvr>
     <a:masterClrMapping/>
   </p:clrMapOvr>
+  <mc:AlternateContent xmlns:mc="http://schemas.openxmlformats.org/markup-compatibility/2006">
+    <mc:Choice xmlns:p14="http://schemas.microsoft.com/office/powerpoint/2010/main" Requires="p14">
+      <p:transition spd="med" p14:dur="700">
+        <p:fade/>
+      </p:transition>
+    </mc:Choice>
+    <mc:Fallback>
+      <p:transition spd="med">
+        <p:fade/>
+      </p:transition>
+    </mc:Fallback>
+  </mc:AlternateContent>
 </p:sld>
 </file>
 
@@ -17776,6 +17821,18 @@
   <p:clrMapOvr>
     <a:masterClrMapping/>
   </p:clrMapOvr>
+  <mc:AlternateContent xmlns:mc="http://schemas.openxmlformats.org/markup-compatibility/2006">
+    <mc:Choice xmlns:p14="http://schemas.microsoft.com/office/powerpoint/2010/main" Requires="p14">
+      <p:transition spd="med" p14:dur="700">
+        <p:fade/>
+      </p:transition>
+    </mc:Choice>
+    <mc:Fallback>
+      <p:transition spd="med">
+        <p:fade/>
+      </p:transition>
+    </mc:Fallback>
+  </mc:AlternateContent>
 </p:sld>
 </file>
 
@@ -18341,6 +18398,18 @@
   <p:clrMapOvr>
     <a:masterClrMapping/>
   </p:clrMapOvr>
+  <mc:AlternateContent xmlns:mc="http://schemas.openxmlformats.org/markup-compatibility/2006">
+    <mc:Choice xmlns:p14="http://schemas.microsoft.com/office/powerpoint/2010/main" Requires="p14">
+      <p:transition spd="slow" p14:dur="1600">
+        <p:blinds dir="vert"/>
+      </p:transition>
+    </mc:Choice>
+    <mc:Fallback>
+      <p:transition spd="slow">
+        <p:blinds dir="vert"/>
+      </p:transition>
+    </mc:Fallback>
+  </mc:AlternateContent>
 </p:sld>
 </file>
 
@@ -19341,6 +19410,18 @@
   <p:clrMapOvr>
     <a:masterClrMapping/>
   </p:clrMapOvr>
+  <mc:AlternateContent xmlns:mc="http://schemas.openxmlformats.org/markup-compatibility/2006">
+    <mc:Choice xmlns:p14="http://schemas.microsoft.com/office/powerpoint/2010/main" Requires="p14">
+      <p:transition spd="slow" p14:dur="1600">
+        <p:blinds dir="vert"/>
+      </p:transition>
+    </mc:Choice>
+    <mc:Fallback>
+      <p:transition spd="slow">
+        <p:blinds dir="vert"/>
+      </p:transition>
+    </mc:Fallback>
+  </mc:AlternateContent>
 </p:sld>
 </file>
 
@@ -20962,6 +21043,9 @@
   <p:clrMapOvr>
     <a:masterClrMapping/>
   </p:clrMapOvr>
+  <p:transition spd="slow">
+    <p:wheel spokes="1"/>
+  </p:transition>
 </p:sld>
 </file>
 
@@ -23214,6 +23298,18 @@
   <p:clrMapOvr>
     <a:masterClrMapping/>
   </p:clrMapOvr>
+  <mc:AlternateContent xmlns:mc="http://schemas.openxmlformats.org/markup-compatibility/2006">
+    <mc:Choice xmlns:p15="http://schemas.microsoft.com/office/powerpoint/2012/main" Requires="p15">
+      <p:transition xmlns:p14="http://schemas.microsoft.com/office/powerpoint/2010/main" spd="slow" p14:dur="2000">
+        <p15:prstTrans prst="fracture"/>
+      </p:transition>
+    </mc:Choice>
+    <mc:Fallback>
+      <p:transition spd="slow">
+        <p:fade/>
+      </p:transition>
+    </mc:Fallback>
+  </mc:AlternateContent>
 </p:sld>
 </file>
 
@@ -24003,6 +24099,9 @@
   <p:clrMapOvr>
     <a:masterClrMapping/>
   </p:clrMapOvr>
+  <p:transition spd="slow">
+    <p:randomBar dir="vert"/>
+  </p:transition>
 </p:sld>
 </file>
 
@@ -26211,6 +26310,18 @@
   <p:clrMapOvr>
     <a:masterClrMapping/>
   </p:clrMapOvr>
+  <mc:AlternateContent xmlns:mc="http://schemas.openxmlformats.org/markup-compatibility/2006">
+    <mc:Choice xmlns:p14="http://schemas.microsoft.com/office/powerpoint/2010/main" Requires="p14">
+      <p:transition spd="slow" p14:dur="1600">
+        <p:blinds dir="vert"/>
+      </p:transition>
+    </mc:Choice>
+    <mc:Fallback>
+      <p:transition spd="slow">
+        <p:blinds dir="vert"/>
+      </p:transition>
+    </mc:Fallback>
+  </mc:AlternateContent>
 </p:sld>
 </file>
 

--- a/presentation.pptx
+++ b/presentation.pptx
@@ -1,5 +1,1807 @@
 
-<file path=ppt/presentation.xml><?xml version="1.0" encoding="utf-8"?>
+<file path=docProps\app.xml><?xml version="1.0" encoding="utf-8"?>
+<Properties xmlns="http://schemas.openxmlformats.org/officeDocument/2006/extended-properties" xmlns:vt="http://schemas.openxmlformats.org/officeDocument/2006/docPropsVTypes">
+  <TotalTime>2115</TotalTime>
+  <Words>827</Words>
+  <Application>Microsoft Office PowerPoint</Application>
+  <PresentationFormat>On-screen Show (16:9)</PresentationFormat>
+  <Paragraphs>276</Paragraphs>
+  <Slides>20</Slides>
+  <Notes>20</Notes>
+  <HiddenSlides>0</HiddenSlides>
+  <MMClips>0</MMClips>
+  <ScaleCrop>false</ScaleCrop>
+  <HeadingPairs>
+    <vt:vector size="6" baseType="variant">
+      <vt:variant>
+        <vt:lpstr>Fonts Used</vt:lpstr>
+      </vt:variant>
+      <vt:variant>
+        <vt:i4>3</vt:i4>
+      </vt:variant>
+      <vt:variant>
+        <vt:lpstr>Theme</vt:lpstr>
+      </vt:variant>
+      <vt:variant>
+        <vt:i4>1</vt:i4>
+      </vt:variant>
+      <vt:variant>
+        <vt:lpstr>Slide Titles</vt:lpstr>
+      </vt:variant>
+      <vt:variant>
+        <vt:i4>20</vt:i4>
+      </vt:variant>
+    </vt:vector>
+  </HeadingPairs>
+  <TitlesOfParts>
+    <vt:vector size="24" baseType="lpstr">
+      <vt:lpstr>Arial</vt:lpstr>
+      <vt:lpstr>Calibri</vt:lpstr>
+      <vt:lpstr>Courier New</vt:lpstr>
+      <vt:lpstr>Office Theme</vt:lpstr>
+      <vt:lpstr>PowerPoint Presentation</vt:lpstr>
+      <vt:lpstr>PowerPoint Presentation</vt:lpstr>
+      <vt:lpstr>PowerPoint Presentation</vt:lpstr>
+      <vt:lpstr>PowerPoint Presentation</vt:lpstr>
+      <vt:lpstr>PowerPoint Presentation</vt:lpstr>
+      <vt:lpstr>PowerPoint Presentation</vt:lpstr>
+      <vt:lpstr>PowerPoint Presentation</vt:lpstr>
+      <vt:lpstr>PowerPoint Presentation</vt:lpstr>
+      <vt:lpstr>PowerPoint Presentation</vt:lpstr>
+      <vt:lpstr>PowerPoint Presentation</vt:lpstr>
+      <vt:lpstr>PowerPoint Presentation</vt:lpstr>
+      <vt:lpstr>PowerPoint Presentation</vt:lpstr>
+      <vt:lpstr>PowerPoint Presentation</vt:lpstr>
+      <vt:lpstr>PowerPoint Presentation</vt:lpstr>
+      <vt:lpstr>PowerPoint Presentation</vt:lpstr>
+      <vt:lpstr>PowerPoint Presentation</vt:lpstr>
+      <vt:lpstr>PowerPoint Presentation</vt:lpstr>
+      <vt:lpstr>PowerPoint Presentation</vt:lpstr>
+      <vt:lpstr>PowerPoint Presentation</vt:lpstr>
+      <vt:lpstr>PowerPoint Presentation</vt:lpstr>
+    </vt:vector>
+  </TitlesOfParts>
+  <Company>PptxGenJS</Company>
+  <LinksUpToDate>false</LinksUpToDate>
+  <SharedDoc>false</SharedDoc>
+  <HyperlinksChanged>false</HyperlinksChanged>
+  <AppVersion>16.0000</AppVersion>
+</Properties>
+</file>
+
+<file path=docProps\core.xml><?xml version="1.0" encoding="utf-8"?>
+<cp:coreProperties xmlns:cp="http://schemas.openxmlformats.org/package/2006/metadata/core-properties" xmlns:dc="http://purl.org/dc/elements/1.1/" xmlns:dcterms="http://purl.org/dc/terms/" xmlns:dcmitype="http://purl.org/dc/dcmitype/" xmlns:xsi="http://www.w3.org/2001/XMLSchema-instance">
+  <dc:title>ფიშინგის სიმულაცია და მომხმარებელთა ცნობიერება</dc:title>
+  <dc:subject>PptxGenJS Presentation</dc:subject>
+  <dc:creator>PptxGenJS</dc:creator>
+  <cp:lastModifiedBy>lasha gongadze</cp:lastModifiedBy>
+  <cp:revision>10</cp:revision>
+  <dcterms:created xsi:type="dcterms:W3CDTF">2026-06-12T08:10:26Z</dcterms:created>
+  <dcterms:modified xsi:type="dcterms:W3CDTF">2026-06-19T14:21:34Z</dcterms:modified>
+</cp:coreProperties>
+</file>
+
+<file path=ppt\notesMasters\notesMaster1.xml><?xml version="1.0" encoding="utf-8"?>
+<p:notesMaster xmlns:a="http://schemas.openxmlformats.org/drawingml/2006/main" xmlns:r="http://schemas.openxmlformats.org/officeDocument/2006/relationships" xmlns:p="http://schemas.openxmlformats.org/presentationml/2006/main">
+  <p:cSld>
+    <p:bg>
+      <p:bgRef idx="1001">
+        <a:schemeClr val="bg1"/>
+      </p:bgRef>
+    </p:bg>
+    <p:spTree>
+      <p:nvGrpSpPr>
+        <p:cNvPr id="1" name=""/>
+        <p:cNvGrpSpPr/>
+        <p:nvPr/>
+      </p:nvGrpSpPr>
+      <p:grpSpPr>
+        <a:xfrm>
+          <a:off x="0" y="0"/>
+          <a:ext cx="0" cy="0"/>
+          <a:chOff x="0" y="0"/>
+          <a:chExt cx="0" cy="0"/>
+        </a:xfrm>
+      </p:grpSpPr>
+    </p:spTree>
+    <p:extLst>
+      <p:ext uri="{BB962C8B-B14F-4D97-AF65-F5344CB8AC3E}">
+        <p14:creationId xmlns:p14="http://schemas.microsoft.com/office/powerpoint/2010/main" val="3528739504"/>
+      </p:ext>
+    </p:extLst>
+  </p:cSld>
+  <p:clrMap bg1="lt1" tx1="dk1" bg2="lt2" tx2="dk2" accent1="accent1" accent2="accent2" accent3="accent3" accent4="accent4" accent5="accent5" accent6="accent6" hlink="hlink" folHlink="folHlink"/>
+  <p:notesStyle>
+    <a:lvl1pPr marL="0" algn="l" defTabSz="914400" rtl="0" eaLnBrk="1" latinLnBrk="0" hangingPunct="1">
+      <a:defRPr sz="1200" kern="1200">
+        <a:solidFill>
+          <a:schemeClr val="tx1"/>
+        </a:solidFill>
+        <a:latin typeface="+mn-lt"/>
+        <a:ea typeface="+mn-ea"/>
+        <a:cs typeface="+mn-cs"/>
+      </a:defRPr>
+    </a:lvl1pPr>
+    <a:lvl2pPr marL="457200" algn="l" defTabSz="914400" rtl="0" eaLnBrk="1" latinLnBrk="0" hangingPunct="1">
+      <a:defRPr sz="1200" kern="1200">
+        <a:solidFill>
+          <a:schemeClr val="tx1"/>
+        </a:solidFill>
+        <a:latin typeface="+mn-lt"/>
+        <a:ea typeface="+mn-ea"/>
+        <a:cs typeface="+mn-cs"/>
+      </a:defRPr>
+    </a:lvl2pPr>
+    <a:lvl3pPr marL="914400" algn="l" defTabSz="914400" rtl="0" eaLnBrk="1" latinLnBrk="0" hangingPunct="1">
+      <a:defRPr sz="1200" kern="1200">
+        <a:solidFill>
+          <a:schemeClr val="tx1"/>
+        </a:solidFill>
+        <a:latin typeface="+mn-lt"/>
+        <a:ea typeface="+mn-ea"/>
+        <a:cs typeface="+mn-cs"/>
+      </a:defRPr>
+    </a:lvl3pPr>
+    <a:lvl4pPr marL="1371600" algn="l" defTabSz="914400" rtl="0" eaLnBrk="1" latinLnBrk="0" hangingPunct="1">
+      <a:defRPr sz="1200" kern="1200">
+        <a:solidFill>
+          <a:schemeClr val="tx1"/>
+        </a:solidFill>
+        <a:latin typeface="+mn-lt"/>
+        <a:ea typeface="+mn-ea"/>
+        <a:cs typeface="+mn-cs"/>
+      </a:defRPr>
+    </a:lvl4pPr>
+    <a:lvl5pPr marL="1828800" algn="l" defTabSz="914400" rtl="0" eaLnBrk="1" latinLnBrk="0" hangingPunct="1">
+      <a:defRPr sz="1200" kern="1200">
+        <a:solidFill>
+          <a:schemeClr val="tx1"/>
+        </a:solidFill>
+        <a:latin typeface="+mn-lt"/>
+        <a:ea typeface="+mn-ea"/>
+        <a:cs typeface="+mn-cs"/>
+      </a:defRPr>
+    </a:lvl5pPr>
+    <a:lvl6pPr marL="2286000" algn="l" defTabSz="914400" rtl="0" eaLnBrk="1" latinLnBrk="0" hangingPunct="1">
+      <a:defRPr sz="1200" kern="1200">
+        <a:solidFill>
+          <a:schemeClr val="tx1"/>
+        </a:solidFill>
+        <a:latin typeface="+mn-lt"/>
+        <a:ea typeface="+mn-ea"/>
+        <a:cs typeface="+mn-cs"/>
+      </a:defRPr>
+    </a:lvl6pPr>
+    <a:lvl7pPr marL="2743200" algn="l" defTabSz="914400" rtl="0" eaLnBrk="1" latinLnBrk="0" hangingPunct="1">
+      <a:defRPr sz="1200" kern="1200">
+        <a:solidFill>
+          <a:schemeClr val="tx1"/>
+        </a:solidFill>
+        <a:latin typeface="+mn-lt"/>
+        <a:ea typeface="+mn-ea"/>
+        <a:cs typeface="+mn-cs"/>
+      </a:defRPr>
+    </a:lvl7pPr>
+    <a:lvl8pPr marL="3200400" algn="l" defTabSz="914400" rtl="0" eaLnBrk="1" latinLnBrk="0" hangingPunct="1">
+      <a:defRPr sz="1200" kern="1200">
+        <a:solidFill>
+          <a:schemeClr val="tx1"/>
+        </a:solidFill>
+        <a:latin typeface="+mn-lt"/>
+        <a:ea typeface="+mn-ea"/>
+        <a:cs typeface="+mn-cs"/>
+      </a:defRPr>
+    </a:lvl8pPr>
+    <a:lvl9pPr marL="3657600" algn="l" defTabSz="914400" rtl="0" eaLnBrk="1" latinLnBrk="0" hangingPunct="1">
+      <a:defRPr sz="1200" kern="1200">
+        <a:solidFill>
+          <a:schemeClr val="tx1"/>
+        </a:solidFill>
+        <a:latin typeface="+mn-lt"/>
+        <a:ea typeface="+mn-ea"/>
+        <a:cs typeface="+mn-cs"/>
+      </a:defRPr>
+    </a:lvl9pPr>
+  </p:notesStyle>
+</p:notesMaster>
+</file>
+
+<file path=ppt\notesSlides\notesSlide1.xml><?xml version="1.0" encoding="utf-8"?>
+<p:notes xmlns:a="http://schemas.openxmlformats.org/drawingml/2006/main" xmlns:r="http://schemas.openxmlformats.org/officeDocument/2006/relationships" xmlns:p="http://schemas.openxmlformats.org/presentationml/2006/main">
+  <p:cSld>
+    <p:spTree>
+      <p:nvGrpSpPr>
+        <p:cNvPr id="1" name=""/>
+        <p:cNvGrpSpPr/>
+        <p:nvPr/>
+      </p:nvGrpSpPr>
+      <p:grpSpPr>
+        <a:xfrm>
+          <a:off x="0" y="0"/>
+          <a:ext cx="0" cy="0"/>
+          <a:chOff x="0" y="0"/>
+          <a:chExt cx="0" cy="0"/>
+        </a:xfrm>
+      </p:grpSpPr>
+      <p:sp>
+        <p:nvSpPr>
+          <p:cNvPr id="2" name="Slide Image Placeholder 1"/>
+          <p:cNvSpPr>
+            <a:spLocks noGrp="1" noRot="1" noChangeAspect="1"/>
+          </p:cNvSpPr>
+          <p:nvPr>
+            <p:ph type="sldImg"/>
+          </p:nvPr>
+        </p:nvSpPr>
+        <p:spPr/>
+      </p:sp>
+      <p:sp>
+        <p:nvSpPr>
+          <p:cNvPr id="3" name="Notes Placeholder 2"/>
+          <p:cNvSpPr>
+            <a:spLocks noGrp="1"/>
+          </p:cNvSpPr>
+          <p:nvPr>
+            <p:ph type="body" idx="1"/>
+          </p:nvPr>
+        </p:nvSpPr>
+        <p:spPr/>
+        <p:txBody>
+          <a:bodyPr/>
+          <a:lstStyle/>
+          <a:p>
+            <a:endParaRPr lang="en-US" dirty="0"/>
+          </a:p>
+        </p:txBody>
+      </p:sp>
+      <p:sp>
+        <p:nvSpPr>
+          <p:cNvPr id="4" name="Slide Number Placeholder 3"/>
+          <p:cNvSpPr>
+            <a:spLocks noGrp="1"/>
+          </p:cNvSpPr>
+          <p:nvPr>
+            <p:ph type="sldNum" sz="quarter" idx="10"/>
+          </p:nvPr>
+        </p:nvSpPr>
+        <p:spPr/>
+        <p:txBody>
+          <a:bodyPr/>
+          <a:lstStyle/>
+          <a:p>
+            <a:fld id="{F7021451-1387-4CA6-816F-3879F97B5CBC}" type="slidenum">
+              <a:rPr lang="en-US"/>
+              <a:t>1</a:t>
+            </a:fld>
+            <a:endParaRPr lang="en-US"/>
+          </a:p>
+        </p:txBody>
+      </p:sp>
+    </p:spTree>
+    <p:extLst>
+      <p:ext uri="{BB962C8B-B14F-4D97-AF65-F5344CB8AC3E}">
+        <p14:creationId xmlns:p14="http://schemas.microsoft.com/office/powerpoint/2010/main" val="1024086991"/>
+      </p:ext>
+    </p:extLst>
+  </p:cSld>
+  <p:clrMapOvr>
+    <a:masterClrMapping/>
+  </p:clrMapOvr>
+</p:notes>
+</file>
+
+<file path=ppt\notesSlides\notesSlide10.xml><?xml version="1.0" encoding="utf-8"?>
+<p:notes xmlns:a="http://schemas.openxmlformats.org/drawingml/2006/main" xmlns:r="http://schemas.openxmlformats.org/officeDocument/2006/relationships" xmlns:p="http://schemas.openxmlformats.org/presentationml/2006/main">
+  <p:cSld>
+    <p:spTree>
+      <p:nvGrpSpPr>
+        <p:cNvPr id="1" name=""/>
+        <p:cNvGrpSpPr/>
+        <p:nvPr/>
+      </p:nvGrpSpPr>
+      <p:grpSpPr>
+        <a:xfrm>
+          <a:off x="0" y="0"/>
+          <a:ext cx="0" cy="0"/>
+          <a:chOff x="0" y="0"/>
+          <a:chExt cx="0" cy="0"/>
+        </a:xfrm>
+      </p:grpSpPr>
+      <p:sp>
+        <p:nvSpPr>
+          <p:cNvPr id="2" name="Slide Image Placeholder 1"/>
+          <p:cNvSpPr>
+            <a:spLocks noGrp="1" noRot="1" noChangeAspect="1"/>
+          </p:cNvSpPr>
+          <p:nvPr>
+            <p:ph type="sldImg"/>
+          </p:nvPr>
+        </p:nvSpPr>
+        <p:spPr/>
+      </p:sp>
+      <p:sp>
+        <p:nvSpPr>
+          <p:cNvPr id="3" name="Notes Placeholder 2"/>
+          <p:cNvSpPr>
+            <a:spLocks noGrp="1"/>
+          </p:cNvSpPr>
+          <p:nvPr>
+            <p:ph type="body" idx="1"/>
+          </p:nvPr>
+        </p:nvSpPr>
+        <p:spPr/>
+        <p:txBody>
+          <a:bodyPr/>
+          <a:lstStyle/>
+          <a:p>
+            <a:endParaRPr lang="en-US" dirty="0"/>
+          </a:p>
+        </p:txBody>
+      </p:sp>
+      <p:sp>
+        <p:nvSpPr>
+          <p:cNvPr id="4" name="Slide Number Placeholder 3"/>
+          <p:cNvSpPr>
+            <a:spLocks noGrp="1"/>
+          </p:cNvSpPr>
+          <p:nvPr>
+            <p:ph type="sldNum" sz="quarter" idx="10"/>
+          </p:nvPr>
+        </p:nvSpPr>
+        <p:spPr/>
+        <p:txBody>
+          <a:bodyPr/>
+          <a:lstStyle/>
+          <a:p>
+            <a:fld id="{F7021451-1387-4CA6-816F-3879F97B5CBC}" type="slidenum">
+              <a:rPr lang="en-US"/>
+              <a:t>10</a:t>
+            </a:fld>
+            <a:endParaRPr lang="en-US"/>
+          </a:p>
+        </p:txBody>
+      </p:sp>
+    </p:spTree>
+    <p:extLst>
+      <p:ext uri="{BB962C8B-B14F-4D97-AF65-F5344CB8AC3E}">
+        <p14:creationId xmlns:p14="http://schemas.microsoft.com/office/powerpoint/2010/main" val="1024086991"/>
+      </p:ext>
+    </p:extLst>
+  </p:cSld>
+  <p:clrMapOvr>
+    <a:masterClrMapping/>
+  </p:clrMapOvr>
+</p:notes>
+</file>
+
+<file path=ppt\notesSlides\notesSlide11.xml><?xml version="1.0" encoding="utf-8"?>
+<p:notes xmlns:a="http://schemas.openxmlformats.org/drawingml/2006/main" xmlns:r="http://schemas.openxmlformats.org/officeDocument/2006/relationships" xmlns:p="http://schemas.openxmlformats.org/presentationml/2006/main">
+  <p:cSld>
+    <p:spTree>
+      <p:nvGrpSpPr>
+        <p:cNvPr id="1" name="">
+          <a:extLst>
+            <a:ext uri="{FF2B5EF4-FFF2-40B4-BE49-F238E27FC236}">
+              <a16:creationId xmlns:a16="http://schemas.microsoft.com/office/drawing/2014/main" id="{C4C06C83-0D6A-DB14-DB6E-0F54B564E242}"/>
+            </a:ext>
+          </a:extLst>
+        </p:cNvPr>
+        <p:cNvGrpSpPr/>
+        <p:nvPr/>
+      </p:nvGrpSpPr>
+      <p:grpSpPr>
+        <a:xfrm>
+          <a:off x="0" y="0"/>
+          <a:ext cx="0" cy="0"/>
+          <a:chOff x="0" y="0"/>
+          <a:chExt cx="0" cy="0"/>
+        </a:xfrm>
+      </p:grpSpPr>
+      <p:sp>
+        <p:nvSpPr>
+          <p:cNvPr id="2" name="Slide Image Placeholder 1">
+            <a:extLst>
+              <a:ext uri="{FF2B5EF4-FFF2-40B4-BE49-F238E27FC236}">
+                <a16:creationId xmlns:a16="http://schemas.microsoft.com/office/drawing/2014/main" id="{36E43695-9FB8-7706-B94A-F6A36CA824CC}"/>
+              </a:ext>
+            </a:extLst>
+          </p:cNvPr>
+          <p:cNvSpPr>
+            <a:spLocks noGrp="1" noRot="1" noChangeAspect="1"/>
+          </p:cNvSpPr>
+          <p:nvPr>
+            <p:ph type="sldImg"/>
+          </p:nvPr>
+        </p:nvSpPr>
+        <p:spPr/>
+      </p:sp>
+      <p:sp>
+        <p:nvSpPr>
+          <p:cNvPr id="3" name="Notes Placeholder 2">
+            <a:extLst>
+              <a:ext uri="{FF2B5EF4-FFF2-40B4-BE49-F238E27FC236}">
+                <a16:creationId xmlns:a16="http://schemas.microsoft.com/office/drawing/2014/main" id="{EE6ADDE9-772C-E925-04EB-1A280BB0E0B2}"/>
+              </a:ext>
+            </a:extLst>
+          </p:cNvPr>
+          <p:cNvSpPr>
+            <a:spLocks noGrp="1"/>
+          </p:cNvSpPr>
+          <p:nvPr>
+            <p:ph type="body" idx="1"/>
+          </p:nvPr>
+        </p:nvSpPr>
+        <p:spPr/>
+        <p:txBody>
+          <a:bodyPr/>
+          <a:lstStyle/>
+          <a:p>
+            <a:endParaRPr lang="en-US" dirty="0"/>
+          </a:p>
+        </p:txBody>
+      </p:sp>
+      <p:sp>
+        <p:nvSpPr>
+          <p:cNvPr id="4" name="Slide Number Placeholder 3">
+            <a:extLst>
+              <a:ext uri="{FF2B5EF4-FFF2-40B4-BE49-F238E27FC236}">
+                <a16:creationId xmlns:a16="http://schemas.microsoft.com/office/drawing/2014/main" id="{20400DCD-E971-5D29-1300-D2E8202D42D7}"/>
+              </a:ext>
+            </a:extLst>
+          </p:cNvPr>
+          <p:cNvSpPr>
+            <a:spLocks noGrp="1"/>
+          </p:cNvSpPr>
+          <p:nvPr>
+            <p:ph type="sldNum" sz="quarter" idx="10"/>
+          </p:nvPr>
+        </p:nvSpPr>
+        <p:spPr/>
+        <p:txBody>
+          <a:bodyPr/>
+          <a:lstStyle/>
+          <a:p>
+            <a:fld id="{F7021451-1387-4CA6-816F-3879F97B5CBC}" type="slidenum">
+              <a:rPr lang="en-US"/>
+              <a:t>11</a:t>
+            </a:fld>
+            <a:endParaRPr lang="en-US"/>
+          </a:p>
+        </p:txBody>
+      </p:sp>
+    </p:spTree>
+    <p:extLst>
+      <p:ext uri="{BB962C8B-B14F-4D97-AF65-F5344CB8AC3E}">
+        <p14:creationId xmlns:p14="http://schemas.microsoft.com/office/powerpoint/2010/main" val="2188082891"/>
+      </p:ext>
+    </p:extLst>
+  </p:cSld>
+  <p:clrMapOvr>
+    <a:masterClrMapping/>
+  </p:clrMapOvr>
+</p:notes>
+</file>
+
+<file path=ppt\notesSlides\notesSlide12.xml><?xml version="1.0" encoding="utf-8"?>
+<p:notes xmlns:a="http://schemas.openxmlformats.org/drawingml/2006/main" xmlns:r="http://schemas.openxmlformats.org/officeDocument/2006/relationships" xmlns:p="http://schemas.openxmlformats.org/presentationml/2006/main">
+  <p:cSld>
+    <p:spTree>
+      <p:nvGrpSpPr>
+        <p:cNvPr id="1" name="">
+          <a:extLst>
+            <a:ext uri="{FF2B5EF4-FFF2-40B4-BE49-F238E27FC236}">
+              <a16:creationId xmlns:a16="http://schemas.microsoft.com/office/drawing/2014/main" id="{03DB0536-B995-813E-F590-1216130E75A2}"/>
+            </a:ext>
+          </a:extLst>
+        </p:cNvPr>
+        <p:cNvGrpSpPr/>
+        <p:nvPr/>
+      </p:nvGrpSpPr>
+      <p:grpSpPr>
+        <a:xfrm>
+          <a:off x="0" y="0"/>
+          <a:ext cx="0" cy="0"/>
+          <a:chOff x="0" y="0"/>
+          <a:chExt cx="0" cy="0"/>
+        </a:xfrm>
+      </p:grpSpPr>
+      <p:sp>
+        <p:nvSpPr>
+          <p:cNvPr id="2" name="Slide Image Placeholder 1">
+            <a:extLst>
+              <a:ext uri="{FF2B5EF4-FFF2-40B4-BE49-F238E27FC236}">
+                <a16:creationId xmlns:a16="http://schemas.microsoft.com/office/drawing/2014/main" id="{921AD0B5-101C-092B-0C01-1A166618E889}"/>
+              </a:ext>
+            </a:extLst>
+          </p:cNvPr>
+          <p:cNvSpPr>
+            <a:spLocks noGrp="1" noRot="1" noChangeAspect="1"/>
+          </p:cNvSpPr>
+          <p:nvPr>
+            <p:ph type="sldImg"/>
+          </p:nvPr>
+        </p:nvSpPr>
+        <p:spPr/>
+      </p:sp>
+      <p:sp>
+        <p:nvSpPr>
+          <p:cNvPr id="3" name="Notes Placeholder 2">
+            <a:extLst>
+              <a:ext uri="{FF2B5EF4-FFF2-40B4-BE49-F238E27FC236}">
+                <a16:creationId xmlns:a16="http://schemas.microsoft.com/office/drawing/2014/main" id="{DFBB9978-A375-529C-1B58-F4BF6F0D5C27}"/>
+              </a:ext>
+            </a:extLst>
+          </p:cNvPr>
+          <p:cNvSpPr>
+            <a:spLocks noGrp="1"/>
+          </p:cNvSpPr>
+          <p:nvPr>
+            <p:ph type="body" idx="1"/>
+          </p:nvPr>
+        </p:nvSpPr>
+        <p:spPr/>
+        <p:txBody>
+          <a:bodyPr/>
+          <a:lstStyle/>
+          <a:p>
+            <a:endParaRPr lang="en-US" dirty="0"/>
+          </a:p>
+        </p:txBody>
+      </p:sp>
+      <p:sp>
+        <p:nvSpPr>
+          <p:cNvPr id="4" name="Slide Number Placeholder 3">
+            <a:extLst>
+              <a:ext uri="{FF2B5EF4-FFF2-40B4-BE49-F238E27FC236}">
+                <a16:creationId xmlns:a16="http://schemas.microsoft.com/office/drawing/2014/main" id="{9867B180-62D8-5669-3FC4-57670B0D6869}"/>
+              </a:ext>
+            </a:extLst>
+          </p:cNvPr>
+          <p:cNvSpPr>
+            <a:spLocks noGrp="1"/>
+          </p:cNvSpPr>
+          <p:nvPr>
+            <p:ph type="sldNum" sz="quarter" idx="10"/>
+          </p:nvPr>
+        </p:nvSpPr>
+        <p:spPr/>
+        <p:txBody>
+          <a:bodyPr/>
+          <a:lstStyle/>
+          <a:p>
+            <a:fld id="{F7021451-1387-4CA6-816F-3879F97B5CBC}" type="slidenum">
+              <a:rPr lang="en-US"/>
+              <a:t>12</a:t>
+            </a:fld>
+            <a:endParaRPr lang="en-US"/>
+          </a:p>
+        </p:txBody>
+      </p:sp>
+    </p:spTree>
+    <p:extLst>
+      <p:ext uri="{BB962C8B-B14F-4D97-AF65-F5344CB8AC3E}">
+        <p14:creationId xmlns:p14="http://schemas.microsoft.com/office/powerpoint/2010/main" val="1848649719"/>
+      </p:ext>
+    </p:extLst>
+  </p:cSld>
+  <p:clrMapOvr>
+    <a:masterClrMapping/>
+  </p:clrMapOvr>
+</p:notes>
+</file>
+
+<file path=ppt\notesSlides\notesSlide13.xml><?xml version="1.0" encoding="utf-8"?>
+<p:notes xmlns:a="http://schemas.openxmlformats.org/drawingml/2006/main" xmlns:r="http://schemas.openxmlformats.org/officeDocument/2006/relationships" xmlns:p="http://schemas.openxmlformats.org/presentationml/2006/main">
+  <p:cSld>
+    <p:spTree>
+      <p:nvGrpSpPr>
+        <p:cNvPr id="1" name=""/>
+        <p:cNvGrpSpPr/>
+        <p:nvPr/>
+      </p:nvGrpSpPr>
+      <p:grpSpPr>
+        <a:xfrm>
+          <a:off x="0" y="0"/>
+          <a:ext cx="0" cy="0"/>
+          <a:chOff x="0" y="0"/>
+          <a:chExt cx="0" cy="0"/>
+        </a:xfrm>
+      </p:grpSpPr>
+      <p:sp>
+        <p:nvSpPr>
+          <p:cNvPr id="2" name="Slide Image Placeholder 1"/>
+          <p:cNvSpPr>
+            <a:spLocks noGrp="1" noRot="1" noChangeAspect="1"/>
+          </p:cNvSpPr>
+          <p:nvPr>
+            <p:ph type="sldImg"/>
+          </p:nvPr>
+        </p:nvSpPr>
+        <p:spPr/>
+      </p:sp>
+      <p:sp>
+        <p:nvSpPr>
+          <p:cNvPr id="3" name="Notes Placeholder 2"/>
+          <p:cNvSpPr>
+            <a:spLocks noGrp="1"/>
+          </p:cNvSpPr>
+          <p:nvPr>
+            <p:ph type="body" idx="1"/>
+          </p:nvPr>
+        </p:nvSpPr>
+        <p:spPr/>
+        <p:txBody>
+          <a:bodyPr/>
+          <a:lstStyle/>
+          <a:p>
+            <a:endParaRPr lang="en-US" dirty="0"/>
+          </a:p>
+        </p:txBody>
+      </p:sp>
+      <p:sp>
+        <p:nvSpPr>
+          <p:cNvPr id="4" name="Slide Number Placeholder 3"/>
+          <p:cNvSpPr>
+            <a:spLocks noGrp="1"/>
+          </p:cNvSpPr>
+          <p:nvPr>
+            <p:ph type="sldNum" sz="quarter" idx="10"/>
+          </p:nvPr>
+        </p:nvSpPr>
+        <p:spPr/>
+        <p:txBody>
+          <a:bodyPr/>
+          <a:lstStyle/>
+          <a:p>
+            <a:fld id="{F7021451-1387-4CA6-816F-3879F97B5CBC}" type="slidenum">
+              <a:rPr lang="en-US"/>
+              <a:t>13</a:t>
+            </a:fld>
+            <a:endParaRPr lang="en-US"/>
+          </a:p>
+        </p:txBody>
+      </p:sp>
+    </p:spTree>
+    <p:extLst>
+      <p:ext uri="{BB962C8B-B14F-4D97-AF65-F5344CB8AC3E}">
+        <p14:creationId xmlns:p14="http://schemas.microsoft.com/office/powerpoint/2010/main" val="1024086991"/>
+      </p:ext>
+    </p:extLst>
+  </p:cSld>
+  <p:clrMapOvr>
+    <a:masterClrMapping/>
+  </p:clrMapOvr>
+</p:notes>
+</file>
+
+<file path=ppt\notesSlides\notesSlide14.xml><?xml version="1.0" encoding="utf-8"?>
+<p:notes xmlns:a="http://schemas.openxmlformats.org/drawingml/2006/main" xmlns:r="http://schemas.openxmlformats.org/officeDocument/2006/relationships" xmlns:p="http://schemas.openxmlformats.org/presentationml/2006/main">
+  <p:cSld>
+    <p:spTree>
+      <p:nvGrpSpPr>
+        <p:cNvPr id="1" name=""/>
+        <p:cNvGrpSpPr/>
+        <p:nvPr/>
+      </p:nvGrpSpPr>
+      <p:grpSpPr>
+        <a:xfrm>
+          <a:off x="0" y="0"/>
+          <a:ext cx="0" cy="0"/>
+          <a:chOff x="0" y="0"/>
+          <a:chExt cx="0" cy="0"/>
+        </a:xfrm>
+      </p:grpSpPr>
+      <p:sp>
+        <p:nvSpPr>
+          <p:cNvPr id="2" name="Slide Image Placeholder 1"/>
+          <p:cNvSpPr>
+            <a:spLocks noGrp="1" noRot="1" noChangeAspect="1"/>
+          </p:cNvSpPr>
+          <p:nvPr>
+            <p:ph type="sldImg"/>
+          </p:nvPr>
+        </p:nvSpPr>
+        <p:spPr/>
+      </p:sp>
+      <p:sp>
+        <p:nvSpPr>
+          <p:cNvPr id="3" name="Notes Placeholder 2"/>
+          <p:cNvSpPr>
+            <a:spLocks noGrp="1"/>
+          </p:cNvSpPr>
+          <p:nvPr>
+            <p:ph type="body" idx="1"/>
+          </p:nvPr>
+        </p:nvSpPr>
+        <p:spPr/>
+        <p:txBody>
+          <a:bodyPr/>
+          <a:lstStyle/>
+          <a:p>
+            <a:endParaRPr lang="en-US" dirty="0"/>
+          </a:p>
+        </p:txBody>
+      </p:sp>
+      <p:sp>
+        <p:nvSpPr>
+          <p:cNvPr id="4" name="Slide Number Placeholder 3"/>
+          <p:cNvSpPr>
+            <a:spLocks noGrp="1"/>
+          </p:cNvSpPr>
+          <p:nvPr>
+            <p:ph type="sldNum" sz="quarter" idx="10"/>
+          </p:nvPr>
+        </p:nvSpPr>
+        <p:spPr/>
+        <p:txBody>
+          <a:bodyPr/>
+          <a:lstStyle/>
+          <a:p>
+            <a:fld id="{F7021451-1387-4CA6-816F-3879F97B5CBC}" type="slidenum">
+              <a:rPr lang="en-US"/>
+              <a:t>14</a:t>
+            </a:fld>
+            <a:endParaRPr lang="en-US"/>
+          </a:p>
+        </p:txBody>
+      </p:sp>
+    </p:spTree>
+    <p:extLst>
+      <p:ext uri="{BB962C8B-B14F-4D97-AF65-F5344CB8AC3E}">
+        <p14:creationId xmlns:p14="http://schemas.microsoft.com/office/powerpoint/2010/main" val="1024086991"/>
+      </p:ext>
+    </p:extLst>
+  </p:cSld>
+  <p:clrMapOvr>
+    <a:masterClrMapping/>
+  </p:clrMapOvr>
+</p:notes>
+</file>
+
+<file path=ppt\notesSlides\notesSlide15.xml><?xml version="1.0" encoding="utf-8"?>
+<p:notes xmlns:a="http://schemas.openxmlformats.org/drawingml/2006/main" xmlns:r="http://schemas.openxmlformats.org/officeDocument/2006/relationships" xmlns:p="http://schemas.openxmlformats.org/presentationml/2006/main">
+  <p:cSld>
+    <p:spTree>
+      <p:nvGrpSpPr>
+        <p:cNvPr id="1" name=""/>
+        <p:cNvGrpSpPr/>
+        <p:nvPr/>
+      </p:nvGrpSpPr>
+      <p:grpSpPr>
+        <a:xfrm>
+          <a:off x="0" y="0"/>
+          <a:ext cx="0" cy="0"/>
+          <a:chOff x="0" y="0"/>
+          <a:chExt cx="0" cy="0"/>
+        </a:xfrm>
+      </p:grpSpPr>
+      <p:sp>
+        <p:nvSpPr>
+          <p:cNvPr id="2" name="Slide Image Placeholder 1"/>
+          <p:cNvSpPr>
+            <a:spLocks noGrp="1" noRot="1" noChangeAspect="1"/>
+          </p:cNvSpPr>
+          <p:nvPr>
+            <p:ph type="sldImg"/>
+          </p:nvPr>
+        </p:nvSpPr>
+        <p:spPr/>
+      </p:sp>
+      <p:sp>
+        <p:nvSpPr>
+          <p:cNvPr id="3" name="Notes Placeholder 2"/>
+          <p:cNvSpPr>
+            <a:spLocks noGrp="1"/>
+          </p:cNvSpPr>
+          <p:nvPr>
+            <p:ph type="body" idx="1"/>
+          </p:nvPr>
+        </p:nvSpPr>
+        <p:spPr/>
+        <p:txBody>
+          <a:bodyPr/>
+          <a:lstStyle/>
+          <a:p>
+            <a:endParaRPr lang="en-US" dirty="0"/>
+          </a:p>
+        </p:txBody>
+      </p:sp>
+      <p:sp>
+        <p:nvSpPr>
+          <p:cNvPr id="4" name="Slide Number Placeholder 3"/>
+          <p:cNvSpPr>
+            <a:spLocks noGrp="1"/>
+          </p:cNvSpPr>
+          <p:nvPr>
+            <p:ph type="sldNum" sz="quarter" idx="10"/>
+          </p:nvPr>
+        </p:nvSpPr>
+        <p:spPr/>
+        <p:txBody>
+          <a:bodyPr/>
+          <a:lstStyle/>
+          <a:p>
+            <a:fld id="{F7021451-1387-4CA6-816F-3879F97B5CBC}" type="slidenum">
+              <a:rPr lang="en-US"/>
+              <a:t>15</a:t>
+            </a:fld>
+            <a:endParaRPr lang="en-US"/>
+          </a:p>
+        </p:txBody>
+      </p:sp>
+    </p:spTree>
+    <p:extLst>
+      <p:ext uri="{BB962C8B-B14F-4D97-AF65-F5344CB8AC3E}">
+        <p14:creationId xmlns:p14="http://schemas.microsoft.com/office/powerpoint/2010/main" val="1024086991"/>
+      </p:ext>
+    </p:extLst>
+  </p:cSld>
+  <p:clrMapOvr>
+    <a:masterClrMapping/>
+  </p:clrMapOvr>
+</p:notes>
+</file>
+
+<file path=ppt\notesSlides\notesSlide16.xml><?xml version="1.0" encoding="utf-8"?>
+<p:notes xmlns:a="http://schemas.openxmlformats.org/drawingml/2006/main" xmlns:r="http://schemas.openxmlformats.org/officeDocument/2006/relationships" xmlns:p="http://schemas.openxmlformats.org/presentationml/2006/main">
+  <p:cSld>
+    <p:spTree>
+      <p:nvGrpSpPr>
+        <p:cNvPr id="1" name=""/>
+        <p:cNvGrpSpPr/>
+        <p:nvPr/>
+      </p:nvGrpSpPr>
+      <p:grpSpPr>
+        <a:xfrm>
+          <a:off x="0" y="0"/>
+          <a:ext cx="0" cy="0"/>
+          <a:chOff x="0" y="0"/>
+          <a:chExt cx="0" cy="0"/>
+        </a:xfrm>
+      </p:grpSpPr>
+      <p:sp>
+        <p:nvSpPr>
+          <p:cNvPr id="2" name="Slide Image Placeholder 1"/>
+          <p:cNvSpPr>
+            <a:spLocks noGrp="1" noRot="1" noChangeAspect="1"/>
+          </p:cNvSpPr>
+          <p:nvPr>
+            <p:ph type="sldImg"/>
+          </p:nvPr>
+        </p:nvSpPr>
+        <p:spPr/>
+      </p:sp>
+      <p:sp>
+        <p:nvSpPr>
+          <p:cNvPr id="3" name="Notes Placeholder 2"/>
+          <p:cNvSpPr>
+            <a:spLocks noGrp="1"/>
+          </p:cNvSpPr>
+          <p:nvPr>
+            <p:ph type="body" idx="1"/>
+          </p:nvPr>
+        </p:nvSpPr>
+        <p:spPr/>
+        <p:txBody>
+          <a:bodyPr/>
+          <a:lstStyle/>
+          <a:p>
+            <a:endParaRPr lang="en-US" dirty="0"/>
+          </a:p>
+        </p:txBody>
+      </p:sp>
+      <p:sp>
+        <p:nvSpPr>
+          <p:cNvPr id="4" name="Slide Number Placeholder 3"/>
+          <p:cNvSpPr>
+            <a:spLocks noGrp="1"/>
+          </p:cNvSpPr>
+          <p:nvPr>
+            <p:ph type="sldNum" sz="quarter" idx="10"/>
+          </p:nvPr>
+        </p:nvSpPr>
+        <p:spPr/>
+        <p:txBody>
+          <a:bodyPr/>
+          <a:lstStyle/>
+          <a:p>
+            <a:fld id="{F7021451-1387-4CA6-816F-3879F97B5CBC}" type="slidenum">
+              <a:rPr lang="en-US"/>
+              <a:t>16</a:t>
+            </a:fld>
+            <a:endParaRPr lang="en-US"/>
+          </a:p>
+        </p:txBody>
+      </p:sp>
+    </p:spTree>
+    <p:extLst>
+      <p:ext uri="{BB962C8B-B14F-4D97-AF65-F5344CB8AC3E}">
+        <p14:creationId xmlns:p14="http://schemas.microsoft.com/office/powerpoint/2010/main" val="1024086991"/>
+      </p:ext>
+    </p:extLst>
+  </p:cSld>
+  <p:clrMapOvr>
+    <a:masterClrMapping/>
+  </p:clrMapOvr>
+</p:notes>
+</file>
+
+<file path=ppt\notesSlides\notesSlide17.xml><?xml version="1.0" encoding="utf-8"?>
+<p:notes xmlns:a="http://schemas.openxmlformats.org/drawingml/2006/main" xmlns:r="http://schemas.openxmlformats.org/officeDocument/2006/relationships" xmlns:p="http://schemas.openxmlformats.org/presentationml/2006/main">
+  <p:cSld>
+    <p:spTree>
+      <p:nvGrpSpPr>
+        <p:cNvPr id="1" name=""/>
+        <p:cNvGrpSpPr/>
+        <p:nvPr/>
+      </p:nvGrpSpPr>
+      <p:grpSpPr>
+        <a:xfrm>
+          <a:off x="0" y="0"/>
+          <a:ext cx="0" cy="0"/>
+          <a:chOff x="0" y="0"/>
+          <a:chExt cx="0" cy="0"/>
+        </a:xfrm>
+      </p:grpSpPr>
+      <p:sp>
+        <p:nvSpPr>
+          <p:cNvPr id="2" name="Slide Image Placeholder 1"/>
+          <p:cNvSpPr>
+            <a:spLocks noGrp="1" noRot="1" noChangeAspect="1"/>
+          </p:cNvSpPr>
+          <p:nvPr>
+            <p:ph type="sldImg"/>
+          </p:nvPr>
+        </p:nvSpPr>
+        <p:spPr/>
+      </p:sp>
+      <p:sp>
+        <p:nvSpPr>
+          <p:cNvPr id="3" name="Notes Placeholder 2"/>
+          <p:cNvSpPr>
+            <a:spLocks noGrp="1"/>
+          </p:cNvSpPr>
+          <p:nvPr>
+            <p:ph type="body" idx="1"/>
+          </p:nvPr>
+        </p:nvSpPr>
+        <p:spPr/>
+        <p:txBody>
+          <a:bodyPr/>
+          <a:lstStyle/>
+          <a:p>
+            <a:endParaRPr lang="en-US" dirty="0"/>
+          </a:p>
+        </p:txBody>
+      </p:sp>
+      <p:sp>
+        <p:nvSpPr>
+          <p:cNvPr id="4" name="Slide Number Placeholder 3"/>
+          <p:cNvSpPr>
+            <a:spLocks noGrp="1"/>
+          </p:cNvSpPr>
+          <p:nvPr>
+            <p:ph type="sldNum" sz="quarter" idx="10"/>
+          </p:nvPr>
+        </p:nvSpPr>
+        <p:spPr/>
+        <p:txBody>
+          <a:bodyPr/>
+          <a:lstStyle/>
+          <a:p>
+            <a:fld id="{F7021451-1387-4CA6-816F-3879F97B5CBC}" type="slidenum">
+              <a:rPr lang="en-US"/>
+              <a:t>17</a:t>
+            </a:fld>
+            <a:endParaRPr lang="en-US"/>
+          </a:p>
+        </p:txBody>
+      </p:sp>
+    </p:spTree>
+    <p:extLst>
+      <p:ext uri="{BB962C8B-B14F-4D97-AF65-F5344CB8AC3E}">
+        <p14:creationId xmlns:p14="http://schemas.microsoft.com/office/powerpoint/2010/main" val="1024086991"/>
+      </p:ext>
+    </p:extLst>
+  </p:cSld>
+  <p:clrMapOvr>
+    <a:masterClrMapping/>
+  </p:clrMapOvr>
+</p:notes>
+</file>
+
+<file path=ppt\notesSlides\notesSlide18.xml><?xml version="1.0" encoding="utf-8"?>
+<p:notes xmlns:a="http://schemas.openxmlformats.org/drawingml/2006/main" xmlns:r="http://schemas.openxmlformats.org/officeDocument/2006/relationships" xmlns:p="http://schemas.openxmlformats.org/presentationml/2006/main">
+  <p:cSld>
+    <p:spTree>
+      <p:nvGrpSpPr>
+        <p:cNvPr id="1" name=""/>
+        <p:cNvGrpSpPr/>
+        <p:nvPr/>
+      </p:nvGrpSpPr>
+      <p:grpSpPr>
+        <a:xfrm>
+          <a:off x="0" y="0"/>
+          <a:ext cx="0" cy="0"/>
+          <a:chOff x="0" y="0"/>
+          <a:chExt cx="0" cy="0"/>
+        </a:xfrm>
+      </p:grpSpPr>
+      <p:sp>
+        <p:nvSpPr>
+          <p:cNvPr id="2" name="Slide Image Placeholder 1"/>
+          <p:cNvSpPr>
+            <a:spLocks noGrp="1" noRot="1" noChangeAspect="1"/>
+          </p:cNvSpPr>
+          <p:nvPr>
+            <p:ph type="sldImg"/>
+          </p:nvPr>
+        </p:nvSpPr>
+        <p:spPr/>
+      </p:sp>
+      <p:sp>
+        <p:nvSpPr>
+          <p:cNvPr id="3" name="Notes Placeholder 2"/>
+          <p:cNvSpPr>
+            <a:spLocks noGrp="1"/>
+          </p:cNvSpPr>
+          <p:nvPr>
+            <p:ph type="body" idx="1"/>
+          </p:nvPr>
+        </p:nvSpPr>
+        <p:spPr/>
+        <p:txBody>
+          <a:bodyPr/>
+          <a:lstStyle/>
+          <a:p>
+            <a:endParaRPr lang="en-US" dirty="0"/>
+          </a:p>
+        </p:txBody>
+      </p:sp>
+      <p:sp>
+        <p:nvSpPr>
+          <p:cNvPr id="4" name="Slide Number Placeholder 3"/>
+          <p:cNvSpPr>
+            <a:spLocks noGrp="1"/>
+          </p:cNvSpPr>
+          <p:nvPr>
+            <p:ph type="sldNum" sz="quarter" idx="10"/>
+          </p:nvPr>
+        </p:nvSpPr>
+        <p:spPr/>
+        <p:txBody>
+          <a:bodyPr/>
+          <a:lstStyle/>
+          <a:p>
+            <a:fld id="{F7021451-1387-4CA6-816F-3879F97B5CBC}" type="slidenum">
+              <a:rPr lang="en-US"/>
+              <a:t>18</a:t>
+            </a:fld>
+            <a:endParaRPr lang="en-US"/>
+          </a:p>
+        </p:txBody>
+      </p:sp>
+    </p:spTree>
+    <p:extLst>
+      <p:ext uri="{BB962C8B-B14F-4D97-AF65-F5344CB8AC3E}">
+        <p14:creationId xmlns:p14="http://schemas.microsoft.com/office/powerpoint/2010/main" val="1024086991"/>
+      </p:ext>
+    </p:extLst>
+  </p:cSld>
+  <p:clrMapOvr>
+    <a:masterClrMapping/>
+  </p:clrMapOvr>
+</p:notes>
+</file>
+
+<file path=ppt\notesSlides\notesSlide19.xml><?xml version="1.0" encoding="utf-8"?>
+<p:notes xmlns:a="http://schemas.openxmlformats.org/drawingml/2006/main" xmlns:r="http://schemas.openxmlformats.org/officeDocument/2006/relationships" xmlns:p="http://schemas.openxmlformats.org/presentationml/2006/main">
+  <p:cSld>
+    <p:spTree>
+      <p:nvGrpSpPr>
+        <p:cNvPr id="1" name=""/>
+        <p:cNvGrpSpPr/>
+        <p:nvPr/>
+      </p:nvGrpSpPr>
+      <p:grpSpPr>
+        <a:xfrm>
+          <a:off x="0" y="0"/>
+          <a:ext cx="0" cy="0"/>
+          <a:chOff x="0" y="0"/>
+          <a:chExt cx="0" cy="0"/>
+        </a:xfrm>
+      </p:grpSpPr>
+      <p:sp>
+        <p:nvSpPr>
+          <p:cNvPr id="2" name="Slide Image Placeholder 1"/>
+          <p:cNvSpPr>
+            <a:spLocks noGrp="1" noRot="1" noChangeAspect="1"/>
+          </p:cNvSpPr>
+          <p:nvPr>
+            <p:ph type="sldImg"/>
+          </p:nvPr>
+        </p:nvSpPr>
+        <p:spPr/>
+      </p:sp>
+      <p:sp>
+        <p:nvSpPr>
+          <p:cNvPr id="3" name="Notes Placeholder 2"/>
+          <p:cNvSpPr>
+            <a:spLocks noGrp="1"/>
+          </p:cNvSpPr>
+          <p:nvPr>
+            <p:ph type="body" idx="1"/>
+          </p:nvPr>
+        </p:nvSpPr>
+        <p:spPr/>
+        <p:txBody>
+          <a:bodyPr/>
+          <a:lstStyle/>
+          <a:p>
+            <a:endParaRPr lang="en-US" dirty="0"/>
+          </a:p>
+        </p:txBody>
+      </p:sp>
+      <p:sp>
+        <p:nvSpPr>
+          <p:cNvPr id="4" name="Slide Number Placeholder 3"/>
+          <p:cNvSpPr>
+            <a:spLocks noGrp="1"/>
+          </p:cNvSpPr>
+          <p:nvPr>
+            <p:ph type="sldNum" sz="quarter" idx="10"/>
+          </p:nvPr>
+        </p:nvSpPr>
+        <p:spPr/>
+        <p:txBody>
+          <a:bodyPr/>
+          <a:lstStyle/>
+          <a:p>
+            <a:fld id="{F7021451-1387-4CA6-816F-3879F97B5CBC}" type="slidenum">
+              <a:rPr lang="en-US"/>
+              <a:t>19</a:t>
+            </a:fld>
+            <a:endParaRPr lang="en-US"/>
+          </a:p>
+        </p:txBody>
+      </p:sp>
+    </p:spTree>
+    <p:extLst>
+      <p:ext uri="{BB962C8B-B14F-4D97-AF65-F5344CB8AC3E}">
+        <p14:creationId xmlns:p14="http://schemas.microsoft.com/office/powerpoint/2010/main" val="1024086991"/>
+      </p:ext>
+    </p:extLst>
+  </p:cSld>
+  <p:clrMapOvr>
+    <a:masterClrMapping/>
+  </p:clrMapOvr>
+</p:notes>
+</file>
+
+<file path=ppt\notesSlides\notesSlide2.xml><?xml version="1.0" encoding="utf-8"?>
+<p:notes xmlns:a="http://schemas.openxmlformats.org/drawingml/2006/main" xmlns:r="http://schemas.openxmlformats.org/officeDocument/2006/relationships" xmlns:p="http://schemas.openxmlformats.org/presentationml/2006/main">
+  <p:cSld>
+    <p:spTree>
+      <p:nvGrpSpPr>
+        <p:cNvPr id="1" name=""/>
+        <p:cNvGrpSpPr/>
+        <p:nvPr/>
+      </p:nvGrpSpPr>
+      <p:grpSpPr>
+        <a:xfrm>
+          <a:off x="0" y="0"/>
+          <a:ext cx="0" cy="0"/>
+          <a:chOff x="0" y="0"/>
+          <a:chExt cx="0" cy="0"/>
+        </a:xfrm>
+      </p:grpSpPr>
+      <p:sp>
+        <p:nvSpPr>
+          <p:cNvPr id="2" name="Slide Image Placeholder 1"/>
+          <p:cNvSpPr>
+            <a:spLocks noGrp="1" noRot="1" noChangeAspect="1"/>
+          </p:cNvSpPr>
+          <p:nvPr>
+            <p:ph type="sldImg"/>
+          </p:nvPr>
+        </p:nvSpPr>
+        <p:spPr/>
+      </p:sp>
+      <p:sp>
+        <p:nvSpPr>
+          <p:cNvPr id="3" name="Notes Placeholder 2"/>
+          <p:cNvSpPr>
+            <a:spLocks noGrp="1"/>
+          </p:cNvSpPr>
+          <p:nvPr>
+            <p:ph type="body" idx="1"/>
+          </p:nvPr>
+        </p:nvSpPr>
+        <p:spPr/>
+        <p:txBody>
+          <a:bodyPr/>
+          <a:lstStyle/>
+          <a:p>
+            <a:endParaRPr lang="en-US" dirty="0"/>
+          </a:p>
+        </p:txBody>
+      </p:sp>
+      <p:sp>
+        <p:nvSpPr>
+          <p:cNvPr id="4" name="Slide Number Placeholder 3"/>
+          <p:cNvSpPr>
+            <a:spLocks noGrp="1"/>
+          </p:cNvSpPr>
+          <p:nvPr>
+            <p:ph type="sldNum" sz="quarter" idx="10"/>
+          </p:nvPr>
+        </p:nvSpPr>
+        <p:spPr/>
+        <p:txBody>
+          <a:bodyPr/>
+          <a:lstStyle/>
+          <a:p>
+            <a:fld id="{F7021451-1387-4CA6-816F-3879F97B5CBC}" type="slidenum">
+              <a:rPr lang="en-US"/>
+              <a:t>2</a:t>
+            </a:fld>
+            <a:endParaRPr lang="en-US"/>
+          </a:p>
+        </p:txBody>
+      </p:sp>
+    </p:spTree>
+    <p:extLst>
+      <p:ext uri="{BB962C8B-B14F-4D97-AF65-F5344CB8AC3E}">
+        <p14:creationId xmlns:p14="http://schemas.microsoft.com/office/powerpoint/2010/main" val="1024086991"/>
+      </p:ext>
+    </p:extLst>
+  </p:cSld>
+  <p:clrMapOvr>
+    <a:masterClrMapping/>
+  </p:clrMapOvr>
+</p:notes>
+</file>
+
+<file path=ppt\notesSlides\notesSlide20.xml><?xml version="1.0" encoding="utf-8"?>
+<p:notes xmlns:a="http://schemas.openxmlformats.org/drawingml/2006/main" xmlns:r="http://schemas.openxmlformats.org/officeDocument/2006/relationships" xmlns:p="http://schemas.openxmlformats.org/presentationml/2006/main">
+  <p:cSld>
+    <p:spTree>
+      <p:nvGrpSpPr>
+        <p:cNvPr id="1" name=""/>
+        <p:cNvGrpSpPr/>
+        <p:nvPr/>
+      </p:nvGrpSpPr>
+      <p:grpSpPr>
+        <a:xfrm>
+          <a:off x="0" y="0"/>
+          <a:ext cx="0" cy="0"/>
+          <a:chOff x="0" y="0"/>
+          <a:chExt cx="0" cy="0"/>
+        </a:xfrm>
+      </p:grpSpPr>
+      <p:sp>
+        <p:nvSpPr>
+          <p:cNvPr id="2" name="Slide Image Placeholder 1"/>
+          <p:cNvSpPr>
+            <a:spLocks noGrp="1" noRot="1" noChangeAspect="1"/>
+          </p:cNvSpPr>
+          <p:nvPr>
+            <p:ph type="sldImg"/>
+          </p:nvPr>
+        </p:nvSpPr>
+        <p:spPr/>
+      </p:sp>
+      <p:sp>
+        <p:nvSpPr>
+          <p:cNvPr id="3" name="Notes Placeholder 2"/>
+          <p:cNvSpPr>
+            <a:spLocks noGrp="1"/>
+          </p:cNvSpPr>
+          <p:nvPr>
+            <p:ph type="body" idx="1"/>
+          </p:nvPr>
+        </p:nvSpPr>
+        <p:spPr/>
+        <p:txBody>
+          <a:bodyPr/>
+          <a:lstStyle/>
+          <a:p>
+            <a:endParaRPr lang="en-US" dirty="0"/>
+          </a:p>
+        </p:txBody>
+      </p:sp>
+      <p:sp>
+        <p:nvSpPr>
+          <p:cNvPr id="4" name="Slide Number Placeholder 3"/>
+          <p:cNvSpPr>
+            <a:spLocks noGrp="1"/>
+          </p:cNvSpPr>
+          <p:nvPr>
+            <p:ph type="sldNum" sz="quarter" idx="10"/>
+          </p:nvPr>
+        </p:nvSpPr>
+        <p:spPr/>
+        <p:txBody>
+          <a:bodyPr/>
+          <a:lstStyle/>
+          <a:p>
+            <a:fld id="{F7021451-1387-4CA6-816F-3879F97B5CBC}" type="slidenum">
+              <a:rPr lang="en-US"/>
+              <a:t>20</a:t>
+            </a:fld>
+            <a:endParaRPr lang="en-US"/>
+          </a:p>
+        </p:txBody>
+      </p:sp>
+    </p:spTree>
+    <p:extLst>
+      <p:ext uri="{BB962C8B-B14F-4D97-AF65-F5344CB8AC3E}">
+        <p14:creationId xmlns:p14="http://schemas.microsoft.com/office/powerpoint/2010/main" val="1024086991"/>
+      </p:ext>
+    </p:extLst>
+  </p:cSld>
+  <p:clrMapOvr>
+    <a:masterClrMapping/>
+  </p:clrMapOvr>
+</p:notes>
+</file>
+
+<file path=ppt\notesSlides\notesSlide3.xml><?xml version="1.0" encoding="utf-8"?>
+<p:notes xmlns:a="http://schemas.openxmlformats.org/drawingml/2006/main" xmlns:r="http://schemas.openxmlformats.org/officeDocument/2006/relationships" xmlns:p="http://schemas.openxmlformats.org/presentationml/2006/main">
+  <p:cSld>
+    <p:spTree>
+      <p:nvGrpSpPr>
+        <p:cNvPr id="1" name=""/>
+        <p:cNvGrpSpPr/>
+        <p:nvPr/>
+      </p:nvGrpSpPr>
+      <p:grpSpPr>
+        <a:xfrm>
+          <a:off x="0" y="0"/>
+          <a:ext cx="0" cy="0"/>
+          <a:chOff x="0" y="0"/>
+          <a:chExt cx="0" cy="0"/>
+        </a:xfrm>
+      </p:grpSpPr>
+      <p:sp>
+        <p:nvSpPr>
+          <p:cNvPr id="2" name="Slide Image Placeholder 1"/>
+          <p:cNvSpPr>
+            <a:spLocks noGrp="1" noRot="1" noChangeAspect="1"/>
+          </p:cNvSpPr>
+          <p:nvPr>
+            <p:ph type="sldImg"/>
+          </p:nvPr>
+        </p:nvSpPr>
+        <p:spPr/>
+      </p:sp>
+      <p:sp>
+        <p:nvSpPr>
+          <p:cNvPr id="3" name="Notes Placeholder 2"/>
+          <p:cNvSpPr>
+            <a:spLocks noGrp="1"/>
+          </p:cNvSpPr>
+          <p:nvPr>
+            <p:ph type="body" idx="1"/>
+          </p:nvPr>
+        </p:nvSpPr>
+        <p:spPr/>
+        <p:txBody>
+          <a:bodyPr/>
+          <a:lstStyle/>
+          <a:p>
+            <a:endParaRPr lang="en-US" dirty="0"/>
+          </a:p>
+        </p:txBody>
+      </p:sp>
+      <p:sp>
+        <p:nvSpPr>
+          <p:cNvPr id="4" name="Slide Number Placeholder 3"/>
+          <p:cNvSpPr>
+            <a:spLocks noGrp="1"/>
+          </p:cNvSpPr>
+          <p:nvPr>
+            <p:ph type="sldNum" sz="quarter" idx="10"/>
+          </p:nvPr>
+        </p:nvSpPr>
+        <p:spPr/>
+        <p:txBody>
+          <a:bodyPr/>
+          <a:lstStyle/>
+          <a:p>
+            <a:fld id="{F7021451-1387-4CA6-816F-3879F97B5CBC}" type="slidenum">
+              <a:rPr lang="en-US"/>
+              <a:t>3</a:t>
+            </a:fld>
+            <a:endParaRPr lang="en-US"/>
+          </a:p>
+        </p:txBody>
+      </p:sp>
+    </p:spTree>
+    <p:extLst>
+      <p:ext uri="{BB962C8B-B14F-4D97-AF65-F5344CB8AC3E}">
+        <p14:creationId xmlns:p14="http://schemas.microsoft.com/office/powerpoint/2010/main" val="1024086991"/>
+      </p:ext>
+    </p:extLst>
+  </p:cSld>
+  <p:clrMapOvr>
+    <a:masterClrMapping/>
+  </p:clrMapOvr>
+</p:notes>
+</file>
+
+<file path=ppt\notesSlides\notesSlide4.xml><?xml version="1.0" encoding="utf-8"?>
+<p:notes xmlns:a="http://schemas.openxmlformats.org/drawingml/2006/main" xmlns:r="http://schemas.openxmlformats.org/officeDocument/2006/relationships" xmlns:p="http://schemas.openxmlformats.org/presentationml/2006/main">
+  <p:cSld>
+    <p:spTree>
+      <p:nvGrpSpPr>
+        <p:cNvPr id="1" name=""/>
+        <p:cNvGrpSpPr/>
+        <p:nvPr/>
+      </p:nvGrpSpPr>
+      <p:grpSpPr>
+        <a:xfrm>
+          <a:off x="0" y="0"/>
+          <a:ext cx="0" cy="0"/>
+          <a:chOff x="0" y="0"/>
+          <a:chExt cx="0" cy="0"/>
+        </a:xfrm>
+      </p:grpSpPr>
+      <p:sp>
+        <p:nvSpPr>
+          <p:cNvPr id="2" name="Slide Image Placeholder 1"/>
+          <p:cNvSpPr>
+            <a:spLocks noGrp="1" noRot="1" noChangeAspect="1"/>
+          </p:cNvSpPr>
+          <p:nvPr>
+            <p:ph type="sldImg"/>
+          </p:nvPr>
+        </p:nvSpPr>
+        <p:spPr/>
+      </p:sp>
+      <p:sp>
+        <p:nvSpPr>
+          <p:cNvPr id="3" name="Notes Placeholder 2"/>
+          <p:cNvSpPr>
+            <a:spLocks noGrp="1"/>
+          </p:cNvSpPr>
+          <p:nvPr>
+            <p:ph type="body" idx="1"/>
+          </p:nvPr>
+        </p:nvSpPr>
+        <p:spPr/>
+        <p:txBody>
+          <a:bodyPr/>
+          <a:lstStyle/>
+          <a:p>
+            <a:endParaRPr lang="en-US" dirty="0"/>
+          </a:p>
+        </p:txBody>
+      </p:sp>
+      <p:sp>
+        <p:nvSpPr>
+          <p:cNvPr id="4" name="Slide Number Placeholder 3"/>
+          <p:cNvSpPr>
+            <a:spLocks noGrp="1"/>
+          </p:cNvSpPr>
+          <p:nvPr>
+            <p:ph type="sldNum" sz="quarter" idx="10"/>
+          </p:nvPr>
+        </p:nvSpPr>
+        <p:spPr/>
+        <p:txBody>
+          <a:bodyPr/>
+          <a:lstStyle/>
+          <a:p>
+            <a:fld id="{F7021451-1387-4CA6-816F-3879F97B5CBC}" type="slidenum">
+              <a:rPr lang="en-US"/>
+              <a:t>4</a:t>
+            </a:fld>
+            <a:endParaRPr lang="en-US"/>
+          </a:p>
+        </p:txBody>
+      </p:sp>
+    </p:spTree>
+    <p:extLst>
+      <p:ext uri="{BB962C8B-B14F-4D97-AF65-F5344CB8AC3E}">
+        <p14:creationId xmlns:p14="http://schemas.microsoft.com/office/powerpoint/2010/main" val="1024086991"/>
+      </p:ext>
+    </p:extLst>
+  </p:cSld>
+  <p:clrMapOvr>
+    <a:masterClrMapping/>
+  </p:clrMapOvr>
+</p:notes>
+</file>
+
+<file path=ppt\notesSlides\notesSlide5.xml><?xml version="1.0" encoding="utf-8"?>
+<p:notes xmlns:a="http://schemas.openxmlformats.org/drawingml/2006/main" xmlns:r="http://schemas.openxmlformats.org/officeDocument/2006/relationships" xmlns:p="http://schemas.openxmlformats.org/presentationml/2006/main">
+  <p:cSld>
+    <p:spTree>
+      <p:nvGrpSpPr>
+        <p:cNvPr id="1" name=""/>
+        <p:cNvGrpSpPr/>
+        <p:nvPr/>
+      </p:nvGrpSpPr>
+      <p:grpSpPr>
+        <a:xfrm>
+          <a:off x="0" y="0"/>
+          <a:ext cx="0" cy="0"/>
+          <a:chOff x="0" y="0"/>
+          <a:chExt cx="0" cy="0"/>
+        </a:xfrm>
+      </p:grpSpPr>
+    </p:spTree>
+  </p:cSld>
+  <p:clrMapOvr>
+    <a:masterClrMapping/>
+  </p:clrMapOvr>
+</p:notes>
+</file>
+
+<file path=ppt\notesSlides\notesSlide6.xml><?xml version="1.0" encoding="utf-8"?>
+<p:notes xmlns:a="http://schemas.openxmlformats.org/drawingml/2006/main" xmlns:r="http://schemas.openxmlformats.org/officeDocument/2006/relationships" xmlns:p="http://schemas.openxmlformats.org/presentationml/2006/main">
+  <p:cSld>
+    <p:spTree>
+      <p:nvGrpSpPr>
+        <p:cNvPr id="1" name=""/>
+        <p:cNvGrpSpPr/>
+        <p:nvPr/>
+      </p:nvGrpSpPr>
+      <p:grpSpPr>
+        <a:xfrm>
+          <a:off x="0" y="0"/>
+          <a:ext cx="0" cy="0"/>
+          <a:chOff x="0" y="0"/>
+          <a:chExt cx="0" cy="0"/>
+        </a:xfrm>
+      </p:grpSpPr>
+    </p:spTree>
+  </p:cSld>
+  <p:clrMapOvr>
+    <a:masterClrMapping/>
+  </p:clrMapOvr>
+</p:notes>
+</file>
+
+<file path=ppt\notesSlides\notesSlide7.xml><?xml version="1.0" encoding="utf-8"?>
+<p:notes xmlns:a="http://schemas.openxmlformats.org/drawingml/2006/main" xmlns:r="http://schemas.openxmlformats.org/officeDocument/2006/relationships" xmlns:p="http://schemas.openxmlformats.org/presentationml/2006/main">
+  <p:cSld>
+    <p:spTree>
+      <p:nvGrpSpPr>
+        <p:cNvPr id="1" name=""/>
+        <p:cNvGrpSpPr/>
+        <p:nvPr/>
+      </p:nvGrpSpPr>
+      <p:grpSpPr>
+        <a:xfrm>
+          <a:off x="0" y="0"/>
+          <a:ext cx="0" cy="0"/>
+          <a:chOff x="0" y="0"/>
+          <a:chExt cx="0" cy="0"/>
+        </a:xfrm>
+      </p:grpSpPr>
+      <p:sp>
+        <p:nvSpPr>
+          <p:cNvPr id="2" name="Slide Image Placeholder 1"/>
+          <p:cNvSpPr>
+            <a:spLocks noGrp="1" noRot="1" noChangeAspect="1"/>
+          </p:cNvSpPr>
+          <p:nvPr>
+            <p:ph type="sldImg"/>
+          </p:nvPr>
+        </p:nvSpPr>
+        <p:spPr/>
+      </p:sp>
+      <p:sp>
+        <p:nvSpPr>
+          <p:cNvPr id="3" name="Notes Placeholder 2"/>
+          <p:cNvSpPr>
+            <a:spLocks noGrp="1"/>
+          </p:cNvSpPr>
+          <p:nvPr>
+            <p:ph type="body" idx="1"/>
+          </p:nvPr>
+        </p:nvSpPr>
+        <p:spPr/>
+        <p:txBody>
+          <a:bodyPr/>
+          <a:lstStyle/>
+          <a:p>
+            <a:endParaRPr lang="en-US" dirty="0"/>
+          </a:p>
+        </p:txBody>
+      </p:sp>
+      <p:sp>
+        <p:nvSpPr>
+          <p:cNvPr id="4" name="Slide Number Placeholder 3"/>
+          <p:cNvSpPr>
+            <a:spLocks noGrp="1"/>
+          </p:cNvSpPr>
+          <p:nvPr>
+            <p:ph type="sldNum" sz="quarter" idx="10"/>
+          </p:nvPr>
+        </p:nvSpPr>
+        <p:spPr/>
+        <p:txBody>
+          <a:bodyPr/>
+          <a:lstStyle/>
+          <a:p>
+            <a:fld id="{F7021451-1387-4CA6-816F-3879F97B5CBC}" type="slidenum">
+              <a:rPr lang="en-US"/>
+              <a:t>7</a:t>
+            </a:fld>
+            <a:endParaRPr lang="en-US"/>
+          </a:p>
+        </p:txBody>
+      </p:sp>
+    </p:spTree>
+    <p:extLst>
+      <p:ext uri="{BB962C8B-B14F-4D97-AF65-F5344CB8AC3E}">
+        <p14:creationId xmlns:p14="http://schemas.microsoft.com/office/powerpoint/2010/main" val="1024086991"/>
+      </p:ext>
+    </p:extLst>
+  </p:cSld>
+  <p:clrMapOvr>
+    <a:masterClrMapping/>
+  </p:clrMapOvr>
+</p:notes>
+</file>
+
+<file path=ppt\notesSlides\notesSlide8.xml><?xml version="1.0" encoding="utf-8"?>
+<p:notes xmlns:a="http://schemas.openxmlformats.org/drawingml/2006/main" xmlns:r="http://schemas.openxmlformats.org/officeDocument/2006/relationships" xmlns:p="http://schemas.openxmlformats.org/presentationml/2006/main">
+  <p:cSld>
+    <p:spTree>
+      <p:nvGrpSpPr>
+        <p:cNvPr id="1" name="">
+          <a:extLst>
+            <a:ext uri="{FF2B5EF4-FFF2-40B4-BE49-F238E27FC236}">
+              <a16:creationId xmlns:a16="http://schemas.microsoft.com/office/drawing/2014/main" id="{9CEB5837-680B-1921-73FF-8624E26371C2}"/>
+            </a:ext>
+          </a:extLst>
+        </p:cNvPr>
+        <p:cNvGrpSpPr/>
+        <p:nvPr/>
+      </p:nvGrpSpPr>
+      <p:grpSpPr>
+        <a:xfrm>
+          <a:off x="0" y="0"/>
+          <a:ext cx="0" cy="0"/>
+          <a:chOff x="0" y="0"/>
+          <a:chExt cx="0" cy="0"/>
+        </a:xfrm>
+      </p:grpSpPr>
+    </p:spTree>
+    <p:extLst>
+      <p:ext uri="{BB962C8B-B14F-4D97-AF65-F5344CB8AC3E}">
+        <p14:creationId xmlns:p14="http://schemas.microsoft.com/office/powerpoint/2010/main" val="1121133579"/>
+      </p:ext>
+    </p:extLst>
+  </p:cSld>
+  <p:clrMapOvr>
+    <a:masterClrMapping/>
+  </p:clrMapOvr>
+</p:notes>
+</file>
+
+<file path=ppt\notesSlides\notesSlide9.xml><?xml version="1.0" encoding="utf-8"?>
+<p:notes xmlns:a="http://schemas.openxmlformats.org/drawingml/2006/main" xmlns:r="http://schemas.openxmlformats.org/officeDocument/2006/relationships" xmlns:p="http://schemas.openxmlformats.org/presentationml/2006/main">
+  <p:cSld>
+    <p:spTree>
+      <p:nvGrpSpPr>
+        <p:cNvPr id="1" name=""/>
+        <p:cNvGrpSpPr/>
+        <p:nvPr/>
+      </p:nvGrpSpPr>
+      <p:grpSpPr>
+        <a:xfrm>
+          <a:off x="0" y="0"/>
+          <a:ext cx="0" cy="0"/>
+          <a:chOff x="0" y="0"/>
+          <a:chExt cx="0" cy="0"/>
+        </a:xfrm>
+      </p:grpSpPr>
+      <p:sp>
+        <p:nvSpPr>
+          <p:cNvPr id="2" name="Slide Image Placeholder 1"/>
+          <p:cNvSpPr>
+            <a:spLocks noGrp="1" noRot="1" noChangeAspect="1"/>
+          </p:cNvSpPr>
+          <p:nvPr>
+            <p:ph type="sldImg"/>
+          </p:nvPr>
+        </p:nvSpPr>
+        <p:spPr/>
+      </p:sp>
+      <p:sp>
+        <p:nvSpPr>
+          <p:cNvPr id="3" name="Notes Placeholder 2"/>
+          <p:cNvSpPr>
+            <a:spLocks noGrp="1"/>
+          </p:cNvSpPr>
+          <p:nvPr>
+            <p:ph type="body" idx="1"/>
+          </p:nvPr>
+        </p:nvSpPr>
+        <p:spPr/>
+        <p:txBody>
+          <a:bodyPr/>
+          <a:lstStyle/>
+          <a:p>
+            <a:endParaRPr lang="en-US" dirty="0"/>
+          </a:p>
+        </p:txBody>
+      </p:sp>
+      <p:sp>
+        <p:nvSpPr>
+          <p:cNvPr id="4" name="Slide Number Placeholder 3"/>
+          <p:cNvSpPr>
+            <a:spLocks noGrp="1"/>
+          </p:cNvSpPr>
+          <p:nvPr>
+            <p:ph type="sldNum" sz="quarter" idx="10"/>
+          </p:nvPr>
+        </p:nvSpPr>
+        <p:spPr/>
+        <p:txBody>
+          <a:bodyPr/>
+          <a:lstStyle/>
+          <a:p>
+            <a:fld id="{F7021451-1387-4CA6-816F-3879F97B5CBC}" type="slidenum">
+              <a:rPr lang="en-US"/>
+              <a:t>9</a:t>
+            </a:fld>
+            <a:endParaRPr lang="en-US"/>
+          </a:p>
+        </p:txBody>
+      </p:sp>
+    </p:spTree>
+    <p:extLst>
+      <p:ext uri="{BB962C8B-B14F-4D97-AF65-F5344CB8AC3E}">
+        <p14:creationId xmlns:p14="http://schemas.microsoft.com/office/powerpoint/2010/main" val="1024086991"/>
+      </p:ext>
+    </p:extLst>
+  </p:cSld>
+  <p:clrMapOvr>
+    <a:masterClrMapping/>
+  </p:clrMapOvr>
+</p:notes>
+</file>
+
+<file path=ppt\presProps.xml><?xml version="1.0" encoding="utf-8"?>
+<p:presentationPr xmlns:a="http://schemas.openxmlformats.org/drawingml/2006/main" xmlns:r="http://schemas.openxmlformats.org/officeDocument/2006/relationships" xmlns:p="http://schemas.openxmlformats.org/presentationml/2006/main">
+  <p:showPr showNarration="1">
+    <p:present/>
+    <p:sldAll/>
+    <p:penClr>
+      <a:prstClr val="red"/>
+    </p:penClr>
+    <p:extLst>
+      <p:ext uri="{EC167BDD-8182-4AB7-AECC-EB403E3ABB37}">
+        <p14:laserClr xmlns:p14="http://schemas.microsoft.com/office/powerpoint/2010/main">
+          <a:srgbClr val="FF0000"/>
+        </p14:laserClr>
+      </p:ext>
+      <p:ext uri="{2FDB2607-1784-4EEB-B798-7EB5836EED8A}">
+        <p14:showMediaCtrls xmlns:p14="http://schemas.microsoft.com/office/powerpoint/2010/main" val="1"/>
+      </p:ext>
+    </p:extLst>
+  </p:showPr>
+  <p:extLst>
+    <p:ext uri="{E76CE94A-603C-4142-B9EB-6D1370010A27}">
+      <p14:discardImageEditData xmlns:p14="http://schemas.microsoft.com/office/powerpoint/2010/main" val="0"/>
+    </p:ext>
+    <p:ext uri="{D31A062A-798A-4329-ABDD-BBA856620510}">
+      <p14:defaultImageDpi xmlns:p14="http://schemas.microsoft.com/office/powerpoint/2010/main" val="220"/>
+    </p:ext>
+    <p:ext uri="{FD5EFAAD-0ECE-453E-9831-46B23BE46B34}">
+      <p15:chartTrackingRefBased xmlns:p15="http://schemas.microsoft.com/office/powerpoint/2012/main" val="0"/>
+    </p:ext>
+  </p:extLst>
+</p:presentationPr>
+</file>
+
+<file path=ppt\presentation.xml><?xml version="1.0" encoding="utf-8"?>
 <p:presentation xmlns:a="http://schemas.openxmlformats.org/drawingml/2006/main" xmlns:r="http://schemas.openxmlformats.org/officeDocument/2006/relationships" xmlns:p="http://schemas.openxmlformats.org/presentationml/2006/main" saveSubsetFonts="1" autoCompressPictures="0">
   <p:sldMasterIdLst>
     <p:sldMasterId id="2147483648" r:id="rId1"/>
@@ -131,1694 +1933,7 @@
 </p:presentation>
 </file>
 
-<file path=ppt/notesMasters/notesMaster1.xml><?xml version="1.0" encoding="utf-8"?>
-<p:notesMaster xmlns:a="http://schemas.openxmlformats.org/drawingml/2006/main" xmlns:r="http://schemas.openxmlformats.org/officeDocument/2006/relationships" xmlns:p="http://schemas.openxmlformats.org/presentationml/2006/main">
-  <p:cSld>
-    <p:bg>
-      <p:bgRef idx="1001">
-        <a:schemeClr val="bg1"/>
-      </p:bgRef>
-    </p:bg>
-    <p:spTree>
-      <p:nvGrpSpPr>
-        <p:cNvPr id="1" name=""/>
-        <p:cNvGrpSpPr/>
-        <p:nvPr/>
-      </p:nvGrpSpPr>
-      <p:grpSpPr>
-        <a:xfrm>
-          <a:off x="0" y="0"/>
-          <a:ext cx="0" cy="0"/>
-          <a:chOff x="0" y="0"/>
-          <a:chExt cx="0" cy="0"/>
-        </a:xfrm>
-      </p:grpSpPr>
-    </p:spTree>
-    <p:extLst>
-      <p:ext uri="{BB962C8B-B14F-4D97-AF65-F5344CB8AC3E}">
-        <p14:creationId xmlns:p14="http://schemas.microsoft.com/office/powerpoint/2010/main" val="3528739504"/>
-      </p:ext>
-    </p:extLst>
-  </p:cSld>
-  <p:clrMap bg1="lt1" tx1="dk1" bg2="lt2" tx2="dk2" accent1="accent1" accent2="accent2" accent3="accent3" accent4="accent4" accent5="accent5" accent6="accent6" hlink="hlink" folHlink="folHlink"/>
-  <p:notesStyle>
-    <a:lvl1pPr marL="0" algn="l" defTabSz="914400" rtl="0" eaLnBrk="1" latinLnBrk="0" hangingPunct="1">
-      <a:defRPr sz="1200" kern="1200">
-        <a:solidFill>
-          <a:schemeClr val="tx1"/>
-        </a:solidFill>
-        <a:latin typeface="+mn-lt"/>
-        <a:ea typeface="+mn-ea"/>
-        <a:cs typeface="+mn-cs"/>
-      </a:defRPr>
-    </a:lvl1pPr>
-    <a:lvl2pPr marL="457200" algn="l" defTabSz="914400" rtl="0" eaLnBrk="1" latinLnBrk="0" hangingPunct="1">
-      <a:defRPr sz="1200" kern="1200">
-        <a:solidFill>
-          <a:schemeClr val="tx1"/>
-        </a:solidFill>
-        <a:latin typeface="+mn-lt"/>
-        <a:ea typeface="+mn-ea"/>
-        <a:cs typeface="+mn-cs"/>
-      </a:defRPr>
-    </a:lvl2pPr>
-    <a:lvl3pPr marL="914400" algn="l" defTabSz="914400" rtl="0" eaLnBrk="1" latinLnBrk="0" hangingPunct="1">
-      <a:defRPr sz="1200" kern="1200">
-        <a:solidFill>
-          <a:schemeClr val="tx1"/>
-        </a:solidFill>
-        <a:latin typeface="+mn-lt"/>
-        <a:ea typeface="+mn-ea"/>
-        <a:cs typeface="+mn-cs"/>
-      </a:defRPr>
-    </a:lvl3pPr>
-    <a:lvl4pPr marL="1371600" algn="l" defTabSz="914400" rtl="0" eaLnBrk="1" latinLnBrk="0" hangingPunct="1">
-      <a:defRPr sz="1200" kern="1200">
-        <a:solidFill>
-          <a:schemeClr val="tx1"/>
-        </a:solidFill>
-        <a:latin typeface="+mn-lt"/>
-        <a:ea typeface="+mn-ea"/>
-        <a:cs typeface="+mn-cs"/>
-      </a:defRPr>
-    </a:lvl4pPr>
-    <a:lvl5pPr marL="1828800" algn="l" defTabSz="914400" rtl="0" eaLnBrk="1" latinLnBrk="0" hangingPunct="1">
-      <a:defRPr sz="1200" kern="1200">
-        <a:solidFill>
-          <a:schemeClr val="tx1"/>
-        </a:solidFill>
-        <a:latin typeface="+mn-lt"/>
-        <a:ea typeface="+mn-ea"/>
-        <a:cs typeface="+mn-cs"/>
-      </a:defRPr>
-    </a:lvl5pPr>
-    <a:lvl6pPr marL="2286000" algn="l" defTabSz="914400" rtl="0" eaLnBrk="1" latinLnBrk="0" hangingPunct="1">
-      <a:defRPr sz="1200" kern="1200">
-        <a:solidFill>
-          <a:schemeClr val="tx1"/>
-        </a:solidFill>
-        <a:latin typeface="+mn-lt"/>
-        <a:ea typeface="+mn-ea"/>
-        <a:cs typeface="+mn-cs"/>
-      </a:defRPr>
-    </a:lvl6pPr>
-    <a:lvl7pPr marL="2743200" algn="l" defTabSz="914400" rtl="0" eaLnBrk="1" latinLnBrk="0" hangingPunct="1">
-      <a:defRPr sz="1200" kern="1200">
-        <a:solidFill>
-          <a:schemeClr val="tx1"/>
-        </a:solidFill>
-        <a:latin typeface="+mn-lt"/>
-        <a:ea typeface="+mn-ea"/>
-        <a:cs typeface="+mn-cs"/>
-      </a:defRPr>
-    </a:lvl7pPr>
-    <a:lvl8pPr marL="3200400" algn="l" defTabSz="914400" rtl="0" eaLnBrk="1" latinLnBrk="0" hangingPunct="1">
-      <a:defRPr sz="1200" kern="1200">
-        <a:solidFill>
-          <a:schemeClr val="tx1"/>
-        </a:solidFill>
-        <a:latin typeface="+mn-lt"/>
-        <a:ea typeface="+mn-ea"/>
-        <a:cs typeface="+mn-cs"/>
-      </a:defRPr>
-    </a:lvl8pPr>
-    <a:lvl9pPr marL="3657600" algn="l" defTabSz="914400" rtl="0" eaLnBrk="1" latinLnBrk="0" hangingPunct="1">
-      <a:defRPr sz="1200" kern="1200">
-        <a:solidFill>
-          <a:schemeClr val="tx1"/>
-        </a:solidFill>
-        <a:latin typeface="+mn-lt"/>
-        <a:ea typeface="+mn-ea"/>
-        <a:cs typeface="+mn-cs"/>
-      </a:defRPr>
-    </a:lvl9pPr>
-  </p:notesStyle>
-</p:notesMaster>
-</file>
-
-<file path=ppt/notesSlides/notesSlide1.xml><?xml version="1.0" encoding="utf-8"?>
-<p:notes xmlns:a="http://schemas.openxmlformats.org/drawingml/2006/main" xmlns:r="http://schemas.openxmlformats.org/officeDocument/2006/relationships" xmlns:p="http://schemas.openxmlformats.org/presentationml/2006/main">
-  <p:cSld>
-    <p:spTree>
-      <p:nvGrpSpPr>
-        <p:cNvPr id="1" name=""/>
-        <p:cNvGrpSpPr/>
-        <p:nvPr/>
-      </p:nvGrpSpPr>
-      <p:grpSpPr>
-        <a:xfrm>
-          <a:off x="0" y="0"/>
-          <a:ext cx="0" cy="0"/>
-          <a:chOff x="0" y="0"/>
-          <a:chExt cx="0" cy="0"/>
-        </a:xfrm>
-      </p:grpSpPr>
-      <p:sp>
-        <p:nvSpPr>
-          <p:cNvPr id="2" name="Slide Image Placeholder 1"/>
-          <p:cNvSpPr>
-            <a:spLocks noGrp="1" noRot="1" noChangeAspect="1"/>
-          </p:cNvSpPr>
-          <p:nvPr>
-            <p:ph type="sldImg"/>
-          </p:nvPr>
-        </p:nvSpPr>
-        <p:spPr/>
-      </p:sp>
-      <p:sp>
-        <p:nvSpPr>
-          <p:cNvPr id="3" name="Notes Placeholder 2"/>
-          <p:cNvSpPr>
-            <a:spLocks noGrp="1"/>
-          </p:cNvSpPr>
-          <p:nvPr>
-            <p:ph type="body" idx="1"/>
-          </p:nvPr>
-        </p:nvSpPr>
-        <p:spPr/>
-        <p:txBody>
-          <a:bodyPr/>
-          <a:lstStyle/>
-          <a:p>
-            <a:endParaRPr lang="en-US" dirty="0"/>
-          </a:p>
-        </p:txBody>
-      </p:sp>
-      <p:sp>
-        <p:nvSpPr>
-          <p:cNvPr id="4" name="Slide Number Placeholder 3"/>
-          <p:cNvSpPr>
-            <a:spLocks noGrp="1"/>
-          </p:cNvSpPr>
-          <p:nvPr>
-            <p:ph type="sldNum" sz="quarter" idx="10"/>
-          </p:nvPr>
-        </p:nvSpPr>
-        <p:spPr/>
-        <p:txBody>
-          <a:bodyPr/>
-          <a:lstStyle/>
-          <a:p>
-            <a:fld id="{F7021451-1387-4CA6-816F-3879F97B5CBC}" type="slidenum">
-              <a:rPr lang="en-US"/>
-              <a:t>1</a:t>
-            </a:fld>
-            <a:endParaRPr lang="en-US"/>
-          </a:p>
-        </p:txBody>
-      </p:sp>
-    </p:spTree>
-    <p:extLst>
-      <p:ext uri="{BB962C8B-B14F-4D97-AF65-F5344CB8AC3E}">
-        <p14:creationId xmlns:p14="http://schemas.microsoft.com/office/powerpoint/2010/main" val="1024086991"/>
-      </p:ext>
-    </p:extLst>
-  </p:cSld>
-  <p:clrMapOvr>
-    <a:masterClrMapping/>
-  </p:clrMapOvr>
-</p:notes>
-</file>
-
-<file path=ppt/notesSlides/notesSlide10.xml><?xml version="1.0" encoding="utf-8"?>
-<p:notes xmlns:a="http://schemas.openxmlformats.org/drawingml/2006/main" xmlns:r="http://schemas.openxmlformats.org/officeDocument/2006/relationships" xmlns:p="http://schemas.openxmlformats.org/presentationml/2006/main">
-  <p:cSld>
-    <p:spTree>
-      <p:nvGrpSpPr>
-        <p:cNvPr id="1" name=""/>
-        <p:cNvGrpSpPr/>
-        <p:nvPr/>
-      </p:nvGrpSpPr>
-      <p:grpSpPr>
-        <a:xfrm>
-          <a:off x="0" y="0"/>
-          <a:ext cx="0" cy="0"/>
-          <a:chOff x="0" y="0"/>
-          <a:chExt cx="0" cy="0"/>
-        </a:xfrm>
-      </p:grpSpPr>
-      <p:sp>
-        <p:nvSpPr>
-          <p:cNvPr id="2" name="Slide Image Placeholder 1"/>
-          <p:cNvSpPr>
-            <a:spLocks noGrp="1" noRot="1" noChangeAspect="1"/>
-          </p:cNvSpPr>
-          <p:nvPr>
-            <p:ph type="sldImg"/>
-          </p:nvPr>
-        </p:nvSpPr>
-        <p:spPr/>
-      </p:sp>
-      <p:sp>
-        <p:nvSpPr>
-          <p:cNvPr id="3" name="Notes Placeholder 2"/>
-          <p:cNvSpPr>
-            <a:spLocks noGrp="1"/>
-          </p:cNvSpPr>
-          <p:nvPr>
-            <p:ph type="body" idx="1"/>
-          </p:nvPr>
-        </p:nvSpPr>
-        <p:spPr/>
-        <p:txBody>
-          <a:bodyPr/>
-          <a:lstStyle/>
-          <a:p>
-            <a:endParaRPr lang="en-US" dirty="0"/>
-          </a:p>
-        </p:txBody>
-      </p:sp>
-      <p:sp>
-        <p:nvSpPr>
-          <p:cNvPr id="4" name="Slide Number Placeholder 3"/>
-          <p:cNvSpPr>
-            <a:spLocks noGrp="1"/>
-          </p:cNvSpPr>
-          <p:nvPr>
-            <p:ph type="sldNum" sz="quarter" idx="10"/>
-          </p:nvPr>
-        </p:nvSpPr>
-        <p:spPr/>
-        <p:txBody>
-          <a:bodyPr/>
-          <a:lstStyle/>
-          <a:p>
-            <a:fld id="{F7021451-1387-4CA6-816F-3879F97B5CBC}" type="slidenum">
-              <a:rPr lang="en-US"/>
-              <a:t>10</a:t>
-            </a:fld>
-            <a:endParaRPr lang="en-US"/>
-          </a:p>
-        </p:txBody>
-      </p:sp>
-    </p:spTree>
-    <p:extLst>
-      <p:ext uri="{BB962C8B-B14F-4D97-AF65-F5344CB8AC3E}">
-        <p14:creationId xmlns:p14="http://schemas.microsoft.com/office/powerpoint/2010/main" val="1024086991"/>
-      </p:ext>
-    </p:extLst>
-  </p:cSld>
-  <p:clrMapOvr>
-    <a:masterClrMapping/>
-  </p:clrMapOvr>
-</p:notes>
-</file>
-
-<file path=ppt/notesSlides/notesSlide11.xml><?xml version="1.0" encoding="utf-8"?>
-<p:notes xmlns:a="http://schemas.openxmlformats.org/drawingml/2006/main" xmlns:r="http://schemas.openxmlformats.org/officeDocument/2006/relationships" xmlns:p="http://schemas.openxmlformats.org/presentationml/2006/main">
-  <p:cSld>
-    <p:spTree>
-      <p:nvGrpSpPr>
-        <p:cNvPr id="1" name="">
-          <a:extLst>
-            <a:ext uri="{FF2B5EF4-FFF2-40B4-BE49-F238E27FC236}">
-              <a16:creationId xmlns:a16="http://schemas.microsoft.com/office/drawing/2014/main" id="{C4C06C83-0D6A-DB14-DB6E-0F54B564E242}"/>
-            </a:ext>
-          </a:extLst>
-        </p:cNvPr>
-        <p:cNvGrpSpPr/>
-        <p:nvPr/>
-      </p:nvGrpSpPr>
-      <p:grpSpPr>
-        <a:xfrm>
-          <a:off x="0" y="0"/>
-          <a:ext cx="0" cy="0"/>
-          <a:chOff x="0" y="0"/>
-          <a:chExt cx="0" cy="0"/>
-        </a:xfrm>
-      </p:grpSpPr>
-      <p:sp>
-        <p:nvSpPr>
-          <p:cNvPr id="2" name="Slide Image Placeholder 1">
-            <a:extLst>
-              <a:ext uri="{FF2B5EF4-FFF2-40B4-BE49-F238E27FC236}">
-                <a16:creationId xmlns:a16="http://schemas.microsoft.com/office/drawing/2014/main" id="{36E43695-9FB8-7706-B94A-F6A36CA824CC}"/>
-              </a:ext>
-            </a:extLst>
-          </p:cNvPr>
-          <p:cNvSpPr>
-            <a:spLocks noGrp="1" noRot="1" noChangeAspect="1"/>
-          </p:cNvSpPr>
-          <p:nvPr>
-            <p:ph type="sldImg"/>
-          </p:nvPr>
-        </p:nvSpPr>
-        <p:spPr/>
-      </p:sp>
-      <p:sp>
-        <p:nvSpPr>
-          <p:cNvPr id="3" name="Notes Placeholder 2">
-            <a:extLst>
-              <a:ext uri="{FF2B5EF4-FFF2-40B4-BE49-F238E27FC236}">
-                <a16:creationId xmlns:a16="http://schemas.microsoft.com/office/drawing/2014/main" id="{EE6ADDE9-772C-E925-04EB-1A280BB0E0B2}"/>
-              </a:ext>
-            </a:extLst>
-          </p:cNvPr>
-          <p:cNvSpPr>
-            <a:spLocks noGrp="1"/>
-          </p:cNvSpPr>
-          <p:nvPr>
-            <p:ph type="body" idx="1"/>
-          </p:nvPr>
-        </p:nvSpPr>
-        <p:spPr/>
-        <p:txBody>
-          <a:bodyPr/>
-          <a:lstStyle/>
-          <a:p>
-            <a:endParaRPr lang="en-US" dirty="0"/>
-          </a:p>
-        </p:txBody>
-      </p:sp>
-      <p:sp>
-        <p:nvSpPr>
-          <p:cNvPr id="4" name="Slide Number Placeholder 3">
-            <a:extLst>
-              <a:ext uri="{FF2B5EF4-FFF2-40B4-BE49-F238E27FC236}">
-                <a16:creationId xmlns:a16="http://schemas.microsoft.com/office/drawing/2014/main" id="{20400DCD-E971-5D29-1300-D2E8202D42D7}"/>
-              </a:ext>
-            </a:extLst>
-          </p:cNvPr>
-          <p:cNvSpPr>
-            <a:spLocks noGrp="1"/>
-          </p:cNvSpPr>
-          <p:nvPr>
-            <p:ph type="sldNum" sz="quarter" idx="10"/>
-          </p:nvPr>
-        </p:nvSpPr>
-        <p:spPr/>
-        <p:txBody>
-          <a:bodyPr/>
-          <a:lstStyle/>
-          <a:p>
-            <a:fld id="{F7021451-1387-4CA6-816F-3879F97B5CBC}" type="slidenum">
-              <a:rPr lang="en-US"/>
-              <a:t>11</a:t>
-            </a:fld>
-            <a:endParaRPr lang="en-US"/>
-          </a:p>
-        </p:txBody>
-      </p:sp>
-    </p:spTree>
-    <p:extLst>
-      <p:ext uri="{BB962C8B-B14F-4D97-AF65-F5344CB8AC3E}">
-        <p14:creationId xmlns:p14="http://schemas.microsoft.com/office/powerpoint/2010/main" val="2188082891"/>
-      </p:ext>
-    </p:extLst>
-  </p:cSld>
-  <p:clrMapOvr>
-    <a:masterClrMapping/>
-  </p:clrMapOvr>
-</p:notes>
-</file>
-
-<file path=ppt/notesSlides/notesSlide12.xml><?xml version="1.0" encoding="utf-8"?>
-<p:notes xmlns:a="http://schemas.openxmlformats.org/drawingml/2006/main" xmlns:r="http://schemas.openxmlformats.org/officeDocument/2006/relationships" xmlns:p="http://schemas.openxmlformats.org/presentationml/2006/main">
-  <p:cSld>
-    <p:spTree>
-      <p:nvGrpSpPr>
-        <p:cNvPr id="1" name="">
-          <a:extLst>
-            <a:ext uri="{FF2B5EF4-FFF2-40B4-BE49-F238E27FC236}">
-              <a16:creationId xmlns:a16="http://schemas.microsoft.com/office/drawing/2014/main" id="{03DB0536-B995-813E-F590-1216130E75A2}"/>
-            </a:ext>
-          </a:extLst>
-        </p:cNvPr>
-        <p:cNvGrpSpPr/>
-        <p:nvPr/>
-      </p:nvGrpSpPr>
-      <p:grpSpPr>
-        <a:xfrm>
-          <a:off x="0" y="0"/>
-          <a:ext cx="0" cy="0"/>
-          <a:chOff x="0" y="0"/>
-          <a:chExt cx="0" cy="0"/>
-        </a:xfrm>
-      </p:grpSpPr>
-      <p:sp>
-        <p:nvSpPr>
-          <p:cNvPr id="2" name="Slide Image Placeholder 1">
-            <a:extLst>
-              <a:ext uri="{FF2B5EF4-FFF2-40B4-BE49-F238E27FC236}">
-                <a16:creationId xmlns:a16="http://schemas.microsoft.com/office/drawing/2014/main" id="{921AD0B5-101C-092B-0C01-1A166618E889}"/>
-              </a:ext>
-            </a:extLst>
-          </p:cNvPr>
-          <p:cNvSpPr>
-            <a:spLocks noGrp="1" noRot="1" noChangeAspect="1"/>
-          </p:cNvSpPr>
-          <p:nvPr>
-            <p:ph type="sldImg"/>
-          </p:nvPr>
-        </p:nvSpPr>
-        <p:spPr/>
-      </p:sp>
-      <p:sp>
-        <p:nvSpPr>
-          <p:cNvPr id="3" name="Notes Placeholder 2">
-            <a:extLst>
-              <a:ext uri="{FF2B5EF4-FFF2-40B4-BE49-F238E27FC236}">
-                <a16:creationId xmlns:a16="http://schemas.microsoft.com/office/drawing/2014/main" id="{DFBB9978-A375-529C-1B58-F4BF6F0D5C27}"/>
-              </a:ext>
-            </a:extLst>
-          </p:cNvPr>
-          <p:cNvSpPr>
-            <a:spLocks noGrp="1"/>
-          </p:cNvSpPr>
-          <p:nvPr>
-            <p:ph type="body" idx="1"/>
-          </p:nvPr>
-        </p:nvSpPr>
-        <p:spPr/>
-        <p:txBody>
-          <a:bodyPr/>
-          <a:lstStyle/>
-          <a:p>
-            <a:endParaRPr lang="en-US" dirty="0"/>
-          </a:p>
-        </p:txBody>
-      </p:sp>
-      <p:sp>
-        <p:nvSpPr>
-          <p:cNvPr id="4" name="Slide Number Placeholder 3">
-            <a:extLst>
-              <a:ext uri="{FF2B5EF4-FFF2-40B4-BE49-F238E27FC236}">
-                <a16:creationId xmlns:a16="http://schemas.microsoft.com/office/drawing/2014/main" id="{9867B180-62D8-5669-3FC4-57670B0D6869}"/>
-              </a:ext>
-            </a:extLst>
-          </p:cNvPr>
-          <p:cNvSpPr>
-            <a:spLocks noGrp="1"/>
-          </p:cNvSpPr>
-          <p:nvPr>
-            <p:ph type="sldNum" sz="quarter" idx="10"/>
-          </p:nvPr>
-        </p:nvSpPr>
-        <p:spPr/>
-        <p:txBody>
-          <a:bodyPr/>
-          <a:lstStyle/>
-          <a:p>
-            <a:fld id="{F7021451-1387-4CA6-816F-3879F97B5CBC}" type="slidenum">
-              <a:rPr lang="en-US"/>
-              <a:t>12</a:t>
-            </a:fld>
-            <a:endParaRPr lang="en-US"/>
-          </a:p>
-        </p:txBody>
-      </p:sp>
-    </p:spTree>
-    <p:extLst>
-      <p:ext uri="{BB962C8B-B14F-4D97-AF65-F5344CB8AC3E}">
-        <p14:creationId xmlns:p14="http://schemas.microsoft.com/office/powerpoint/2010/main" val="1848649719"/>
-      </p:ext>
-    </p:extLst>
-  </p:cSld>
-  <p:clrMapOvr>
-    <a:masterClrMapping/>
-  </p:clrMapOvr>
-</p:notes>
-</file>
-
-<file path=ppt/notesSlides/notesSlide13.xml><?xml version="1.0" encoding="utf-8"?>
-<p:notes xmlns:a="http://schemas.openxmlformats.org/drawingml/2006/main" xmlns:r="http://schemas.openxmlformats.org/officeDocument/2006/relationships" xmlns:p="http://schemas.openxmlformats.org/presentationml/2006/main">
-  <p:cSld>
-    <p:spTree>
-      <p:nvGrpSpPr>
-        <p:cNvPr id="1" name=""/>
-        <p:cNvGrpSpPr/>
-        <p:nvPr/>
-      </p:nvGrpSpPr>
-      <p:grpSpPr>
-        <a:xfrm>
-          <a:off x="0" y="0"/>
-          <a:ext cx="0" cy="0"/>
-          <a:chOff x="0" y="0"/>
-          <a:chExt cx="0" cy="0"/>
-        </a:xfrm>
-      </p:grpSpPr>
-      <p:sp>
-        <p:nvSpPr>
-          <p:cNvPr id="2" name="Slide Image Placeholder 1"/>
-          <p:cNvSpPr>
-            <a:spLocks noGrp="1" noRot="1" noChangeAspect="1"/>
-          </p:cNvSpPr>
-          <p:nvPr>
-            <p:ph type="sldImg"/>
-          </p:nvPr>
-        </p:nvSpPr>
-        <p:spPr/>
-      </p:sp>
-      <p:sp>
-        <p:nvSpPr>
-          <p:cNvPr id="3" name="Notes Placeholder 2"/>
-          <p:cNvSpPr>
-            <a:spLocks noGrp="1"/>
-          </p:cNvSpPr>
-          <p:nvPr>
-            <p:ph type="body" idx="1"/>
-          </p:nvPr>
-        </p:nvSpPr>
-        <p:spPr/>
-        <p:txBody>
-          <a:bodyPr/>
-          <a:lstStyle/>
-          <a:p>
-            <a:endParaRPr lang="en-US" dirty="0"/>
-          </a:p>
-        </p:txBody>
-      </p:sp>
-      <p:sp>
-        <p:nvSpPr>
-          <p:cNvPr id="4" name="Slide Number Placeholder 3"/>
-          <p:cNvSpPr>
-            <a:spLocks noGrp="1"/>
-          </p:cNvSpPr>
-          <p:nvPr>
-            <p:ph type="sldNum" sz="quarter" idx="10"/>
-          </p:nvPr>
-        </p:nvSpPr>
-        <p:spPr/>
-        <p:txBody>
-          <a:bodyPr/>
-          <a:lstStyle/>
-          <a:p>
-            <a:fld id="{F7021451-1387-4CA6-816F-3879F97B5CBC}" type="slidenum">
-              <a:rPr lang="en-US"/>
-              <a:t>13</a:t>
-            </a:fld>
-            <a:endParaRPr lang="en-US"/>
-          </a:p>
-        </p:txBody>
-      </p:sp>
-    </p:spTree>
-    <p:extLst>
-      <p:ext uri="{BB962C8B-B14F-4D97-AF65-F5344CB8AC3E}">
-        <p14:creationId xmlns:p14="http://schemas.microsoft.com/office/powerpoint/2010/main" val="1024086991"/>
-      </p:ext>
-    </p:extLst>
-  </p:cSld>
-  <p:clrMapOvr>
-    <a:masterClrMapping/>
-  </p:clrMapOvr>
-</p:notes>
-</file>
-
-<file path=ppt/notesSlides/notesSlide14.xml><?xml version="1.0" encoding="utf-8"?>
-<p:notes xmlns:a="http://schemas.openxmlformats.org/drawingml/2006/main" xmlns:r="http://schemas.openxmlformats.org/officeDocument/2006/relationships" xmlns:p="http://schemas.openxmlformats.org/presentationml/2006/main">
-  <p:cSld>
-    <p:spTree>
-      <p:nvGrpSpPr>
-        <p:cNvPr id="1" name=""/>
-        <p:cNvGrpSpPr/>
-        <p:nvPr/>
-      </p:nvGrpSpPr>
-      <p:grpSpPr>
-        <a:xfrm>
-          <a:off x="0" y="0"/>
-          <a:ext cx="0" cy="0"/>
-          <a:chOff x="0" y="0"/>
-          <a:chExt cx="0" cy="0"/>
-        </a:xfrm>
-      </p:grpSpPr>
-      <p:sp>
-        <p:nvSpPr>
-          <p:cNvPr id="2" name="Slide Image Placeholder 1"/>
-          <p:cNvSpPr>
-            <a:spLocks noGrp="1" noRot="1" noChangeAspect="1"/>
-          </p:cNvSpPr>
-          <p:nvPr>
-            <p:ph type="sldImg"/>
-          </p:nvPr>
-        </p:nvSpPr>
-        <p:spPr/>
-      </p:sp>
-      <p:sp>
-        <p:nvSpPr>
-          <p:cNvPr id="3" name="Notes Placeholder 2"/>
-          <p:cNvSpPr>
-            <a:spLocks noGrp="1"/>
-          </p:cNvSpPr>
-          <p:nvPr>
-            <p:ph type="body" idx="1"/>
-          </p:nvPr>
-        </p:nvSpPr>
-        <p:spPr/>
-        <p:txBody>
-          <a:bodyPr/>
-          <a:lstStyle/>
-          <a:p>
-            <a:endParaRPr lang="en-US" dirty="0"/>
-          </a:p>
-        </p:txBody>
-      </p:sp>
-      <p:sp>
-        <p:nvSpPr>
-          <p:cNvPr id="4" name="Slide Number Placeholder 3"/>
-          <p:cNvSpPr>
-            <a:spLocks noGrp="1"/>
-          </p:cNvSpPr>
-          <p:nvPr>
-            <p:ph type="sldNum" sz="quarter" idx="10"/>
-          </p:nvPr>
-        </p:nvSpPr>
-        <p:spPr/>
-        <p:txBody>
-          <a:bodyPr/>
-          <a:lstStyle/>
-          <a:p>
-            <a:fld id="{F7021451-1387-4CA6-816F-3879F97B5CBC}" type="slidenum">
-              <a:rPr lang="en-US"/>
-              <a:t>14</a:t>
-            </a:fld>
-            <a:endParaRPr lang="en-US"/>
-          </a:p>
-        </p:txBody>
-      </p:sp>
-    </p:spTree>
-    <p:extLst>
-      <p:ext uri="{BB962C8B-B14F-4D97-AF65-F5344CB8AC3E}">
-        <p14:creationId xmlns:p14="http://schemas.microsoft.com/office/powerpoint/2010/main" val="1024086991"/>
-      </p:ext>
-    </p:extLst>
-  </p:cSld>
-  <p:clrMapOvr>
-    <a:masterClrMapping/>
-  </p:clrMapOvr>
-</p:notes>
-</file>
-
-<file path=ppt/notesSlides/notesSlide15.xml><?xml version="1.0" encoding="utf-8"?>
-<p:notes xmlns:a="http://schemas.openxmlformats.org/drawingml/2006/main" xmlns:r="http://schemas.openxmlformats.org/officeDocument/2006/relationships" xmlns:p="http://schemas.openxmlformats.org/presentationml/2006/main">
-  <p:cSld>
-    <p:spTree>
-      <p:nvGrpSpPr>
-        <p:cNvPr id="1" name=""/>
-        <p:cNvGrpSpPr/>
-        <p:nvPr/>
-      </p:nvGrpSpPr>
-      <p:grpSpPr>
-        <a:xfrm>
-          <a:off x="0" y="0"/>
-          <a:ext cx="0" cy="0"/>
-          <a:chOff x="0" y="0"/>
-          <a:chExt cx="0" cy="0"/>
-        </a:xfrm>
-      </p:grpSpPr>
-      <p:sp>
-        <p:nvSpPr>
-          <p:cNvPr id="2" name="Slide Image Placeholder 1"/>
-          <p:cNvSpPr>
-            <a:spLocks noGrp="1" noRot="1" noChangeAspect="1"/>
-          </p:cNvSpPr>
-          <p:nvPr>
-            <p:ph type="sldImg"/>
-          </p:nvPr>
-        </p:nvSpPr>
-        <p:spPr/>
-      </p:sp>
-      <p:sp>
-        <p:nvSpPr>
-          <p:cNvPr id="3" name="Notes Placeholder 2"/>
-          <p:cNvSpPr>
-            <a:spLocks noGrp="1"/>
-          </p:cNvSpPr>
-          <p:nvPr>
-            <p:ph type="body" idx="1"/>
-          </p:nvPr>
-        </p:nvSpPr>
-        <p:spPr/>
-        <p:txBody>
-          <a:bodyPr/>
-          <a:lstStyle/>
-          <a:p>
-            <a:endParaRPr lang="en-US" dirty="0"/>
-          </a:p>
-        </p:txBody>
-      </p:sp>
-      <p:sp>
-        <p:nvSpPr>
-          <p:cNvPr id="4" name="Slide Number Placeholder 3"/>
-          <p:cNvSpPr>
-            <a:spLocks noGrp="1"/>
-          </p:cNvSpPr>
-          <p:nvPr>
-            <p:ph type="sldNum" sz="quarter" idx="10"/>
-          </p:nvPr>
-        </p:nvSpPr>
-        <p:spPr/>
-        <p:txBody>
-          <a:bodyPr/>
-          <a:lstStyle/>
-          <a:p>
-            <a:fld id="{F7021451-1387-4CA6-816F-3879F97B5CBC}" type="slidenum">
-              <a:rPr lang="en-US"/>
-              <a:t>15</a:t>
-            </a:fld>
-            <a:endParaRPr lang="en-US"/>
-          </a:p>
-        </p:txBody>
-      </p:sp>
-    </p:spTree>
-    <p:extLst>
-      <p:ext uri="{BB962C8B-B14F-4D97-AF65-F5344CB8AC3E}">
-        <p14:creationId xmlns:p14="http://schemas.microsoft.com/office/powerpoint/2010/main" val="1024086991"/>
-      </p:ext>
-    </p:extLst>
-  </p:cSld>
-  <p:clrMapOvr>
-    <a:masterClrMapping/>
-  </p:clrMapOvr>
-</p:notes>
-</file>
-
-<file path=ppt/notesSlides/notesSlide16.xml><?xml version="1.0" encoding="utf-8"?>
-<p:notes xmlns:a="http://schemas.openxmlformats.org/drawingml/2006/main" xmlns:r="http://schemas.openxmlformats.org/officeDocument/2006/relationships" xmlns:p="http://schemas.openxmlformats.org/presentationml/2006/main">
-  <p:cSld>
-    <p:spTree>
-      <p:nvGrpSpPr>
-        <p:cNvPr id="1" name=""/>
-        <p:cNvGrpSpPr/>
-        <p:nvPr/>
-      </p:nvGrpSpPr>
-      <p:grpSpPr>
-        <a:xfrm>
-          <a:off x="0" y="0"/>
-          <a:ext cx="0" cy="0"/>
-          <a:chOff x="0" y="0"/>
-          <a:chExt cx="0" cy="0"/>
-        </a:xfrm>
-      </p:grpSpPr>
-      <p:sp>
-        <p:nvSpPr>
-          <p:cNvPr id="2" name="Slide Image Placeholder 1"/>
-          <p:cNvSpPr>
-            <a:spLocks noGrp="1" noRot="1" noChangeAspect="1"/>
-          </p:cNvSpPr>
-          <p:nvPr>
-            <p:ph type="sldImg"/>
-          </p:nvPr>
-        </p:nvSpPr>
-        <p:spPr/>
-      </p:sp>
-      <p:sp>
-        <p:nvSpPr>
-          <p:cNvPr id="3" name="Notes Placeholder 2"/>
-          <p:cNvSpPr>
-            <a:spLocks noGrp="1"/>
-          </p:cNvSpPr>
-          <p:nvPr>
-            <p:ph type="body" idx="1"/>
-          </p:nvPr>
-        </p:nvSpPr>
-        <p:spPr/>
-        <p:txBody>
-          <a:bodyPr/>
-          <a:lstStyle/>
-          <a:p>
-            <a:endParaRPr lang="en-US" dirty="0"/>
-          </a:p>
-        </p:txBody>
-      </p:sp>
-      <p:sp>
-        <p:nvSpPr>
-          <p:cNvPr id="4" name="Slide Number Placeholder 3"/>
-          <p:cNvSpPr>
-            <a:spLocks noGrp="1"/>
-          </p:cNvSpPr>
-          <p:nvPr>
-            <p:ph type="sldNum" sz="quarter" idx="10"/>
-          </p:nvPr>
-        </p:nvSpPr>
-        <p:spPr/>
-        <p:txBody>
-          <a:bodyPr/>
-          <a:lstStyle/>
-          <a:p>
-            <a:fld id="{F7021451-1387-4CA6-816F-3879F97B5CBC}" type="slidenum">
-              <a:rPr lang="en-US"/>
-              <a:t>16</a:t>
-            </a:fld>
-            <a:endParaRPr lang="en-US"/>
-          </a:p>
-        </p:txBody>
-      </p:sp>
-    </p:spTree>
-    <p:extLst>
-      <p:ext uri="{BB962C8B-B14F-4D97-AF65-F5344CB8AC3E}">
-        <p14:creationId xmlns:p14="http://schemas.microsoft.com/office/powerpoint/2010/main" val="1024086991"/>
-      </p:ext>
-    </p:extLst>
-  </p:cSld>
-  <p:clrMapOvr>
-    <a:masterClrMapping/>
-  </p:clrMapOvr>
-</p:notes>
-</file>
-
-<file path=ppt/notesSlides/notesSlide17.xml><?xml version="1.0" encoding="utf-8"?>
-<p:notes xmlns:a="http://schemas.openxmlformats.org/drawingml/2006/main" xmlns:r="http://schemas.openxmlformats.org/officeDocument/2006/relationships" xmlns:p="http://schemas.openxmlformats.org/presentationml/2006/main">
-  <p:cSld>
-    <p:spTree>
-      <p:nvGrpSpPr>
-        <p:cNvPr id="1" name=""/>
-        <p:cNvGrpSpPr/>
-        <p:nvPr/>
-      </p:nvGrpSpPr>
-      <p:grpSpPr>
-        <a:xfrm>
-          <a:off x="0" y="0"/>
-          <a:ext cx="0" cy="0"/>
-          <a:chOff x="0" y="0"/>
-          <a:chExt cx="0" cy="0"/>
-        </a:xfrm>
-      </p:grpSpPr>
-      <p:sp>
-        <p:nvSpPr>
-          <p:cNvPr id="2" name="Slide Image Placeholder 1"/>
-          <p:cNvSpPr>
-            <a:spLocks noGrp="1" noRot="1" noChangeAspect="1"/>
-          </p:cNvSpPr>
-          <p:nvPr>
-            <p:ph type="sldImg"/>
-          </p:nvPr>
-        </p:nvSpPr>
-        <p:spPr/>
-      </p:sp>
-      <p:sp>
-        <p:nvSpPr>
-          <p:cNvPr id="3" name="Notes Placeholder 2"/>
-          <p:cNvSpPr>
-            <a:spLocks noGrp="1"/>
-          </p:cNvSpPr>
-          <p:nvPr>
-            <p:ph type="body" idx="1"/>
-          </p:nvPr>
-        </p:nvSpPr>
-        <p:spPr/>
-        <p:txBody>
-          <a:bodyPr/>
-          <a:lstStyle/>
-          <a:p>
-            <a:endParaRPr lang="en-US" dirty="0"/>
-          </a:p>
-        </p:txBody>
-      </p:sp>
-      <p:sp>
-        <p:nvSpPr>
-          <p:cNvPr id="4" name="Slide Number Placeholder 3"/>
-          <p:cNvSpPr>
-            <a:spLocks noGrp="1"/>
-          </p:cNvSpPr>
-          <p:nvPr>
-            <p:ph type="sldNum" sz="quarter" idx="10"/>
-          </p:nvPr>
-        </p:nvSpPr>
-        <p:spPr/>
-        <p:txBody>
-          <a:bodyPr/>
-          <a:lstStyle/>
-          <a:p>
-            <a:fld id="{F7021451-1387-4CA6-816F-3879F97B5CBC}" type="slidenum">
-              <a:rPr lang="en-US"/>
-              <a:t>17</a:t>
-            </a:fld>
-            <a:endParaRPr lang="en-US"/>
-          </a:p>
-        </p:txBody>
-      </p:sp>
-    </p:spTree>
-    <p:extLst>
-      <p:ext uri="{BB962C8B-B14F-4D97-AF65-F5344CB8AC3E}">
-        <p14:creationId xmlns:p14="http://schemas.microsoft.com/office/powerpoint/2010/main" val="1024086991"/>
-      </p:ext>
-    </p:extLst>
-  </p:cSld>
-  <p:clrMapOvr>
-    <a:masterClrMapping/>
-  </p:clrMapOvr>
-</p:notes>
-</file>
-
-<file path=ppt/notesSlides/notesSlide18.xml><?xml version="1.0" encoding="utf-8"?>
-<p:notes xmlns:a="http://schemas.openxmlformats.org/drawingml/2006/main" xmlns:r="http://schemas.openxmlformats.org/officeDocument/2006/relationships" xmlns:p="http://schemas.openxmlformats.org/presentationml/2006/main">
-  <p:cSld>
-    <p:spTree>
-      <p:nvGrpSpPr>
-        <p:cNvPr id="1" name=""/>
-        <p:cNvGrpSpPr/>
-        <p:nvPr/>
-      </p:nvGrpSpPr>
-      <p:grpSpPr>
-        <a:xfrm>
-          <a:off x="0" y="0"/>
-          <a:ext cx="0" cy="0"/>
-          <a:chOff x="0" y="0"/>
-          <a:chExt cx="0" cy="0"/>
-        </a:xfrm>
-      </p:grpSpPr>
-      <p:sp>
-        <p:nvSpPr>
-          <p:cNvPr id="2" name="Slide Image Placeholder 1"/>
-          <p:cNvSpPr>
-            <a:spLocks noGrp="1" noRot="1" noChangeAspect="1"/>
-          </p:cNvSpPr>
-          <p:nvPr>
-            <p:ph type="sldImg"/>
-          </p:nvPr>
-        </p:nvSpPr>
-        <p:spPr/>
-      </p:sp>
-      <p:sp>
-        <p:nvSpPr>
-          <p:cNvPr id="3" name="Notes Placeholder 2"/>
-          <p:cNvSpPr>
-            <a:spLocks noGrp="1"/>
-          </p:cNvSpPr>
-          <p:nvPr>
-            <p:ph type="body" idx="1"/>
-          </p:nvPr>
-        </p:nvSpPr>
-        <p:spPr/>
-        <p:txBody>
-          <a:bodyPr/>
-          <a:lstStyle/>
-          <a:p>
-            <a:endParaRPr lang="en-US" dirty="0"/>
-          </a:p>
-        </p:txBody>
-      </p:sp>
-      <p:sp>
-        <p:nvSpPr>
-          <p:cNvPr id="4" name="Slide Number Placeholder 3"/>
-          <p:cNvSpPr>
-            <a:spLocks noGrp="1"/>
-          </p:cNvSpPr>
-          <p:nvPr>
-            <p:ph type="sldNum" sz="quarter" idx="10"/>
-          </p:nvPr>
-        </p:nvSpPr>
-        <p:spPr/>
-        <p:txBody>
-          <a:bodyPr/>
-          <a:lstStyle/>
-          <a:p>
-            <a:fld id="{F7021451-1387-4CA6-816F-3879F97B5CBC}" type="slidenum">
-              <a:rPr lang="en-US"/>
-              <a:t>18</a:t>
-            </a:fld>
-            <a:endParaRPr lang="en-US"/>
-          </a:p>
-        </p:txBody>
-      </p:sp>
-    </p:spTree>
-    <p:extLst>
-      <p:ext uri="{BB962C8B-B14F-4D97-AF65-F5344CB8AC3E}">
-        <p14:creationId xmlns:p14="http://schemas.microsoft.com/office/powerpoint/2010/main" val="1024086991"/>
-      </p:ext>
-    </p:extLst>
-  </p:cSld>
-  <p:clrMapOvr>
-    <a:masterClrMapping/>
-  </p:clrMapOvr>
-</p:notes>
-</file>
-
-<file path=ppt/notesSlides/notesSlide19.xml><?xml version="1.0" encoding="utf-8"?>
-<p:notes xmlns:a="http://schemas.openxmlformats.org/drawingml/2006/main" xmlns:r="http://schemas.openxmlformats.org/officeDocument/2006/relationships" xmlns:p="http://schemas.openxmlformats.org/presentationml/2006/main">
-  <p:cSld>
-    <p:spTree>
-      <p:nvGrpSpPr>
-        <p:cNvPr id="1" name=""/>
-        <p:cNvGrpSpPr/>
-        <p:nvPr/>
-      </p:nvGrpSpPr>
-      <p:grpSpPr>
-        <a:xfrm>
-          <a:off x="0" y="0"/>
-          <a:ext cx="0" cy="0"/>
-          <a:chOff x="0" y="0"/>
-          <a:chExt cx="0" cy="0"/>
-        </a:xfrm>
-      </p:grpSpPr>
-      <p:sp>
-        <p:nvSpPr>
-          <p:cNvPr id="2" name="Slide Image Placeholder 1"/>
-          <p:cNvSpPr>
-            <a:spLocks noGrp="1" noRot="1" noChangeAspect="1"/>
-          </p:cNvSpPr>
-          <p:nvPr>
-            <p:ph type="sldImg"/>
-          </p:nvPr>
-        </p:nvSpPr>
-        <p:spPr/>
-      </p:sp>
-      <p:sp>
-        <p:nvSpPr>
-          <p:cNvPr id="3" name="Notes Placeholder 2"/>
-          <p:cNvSpPr>
-            <a:spLocks noGrp="1"/>
-          </p:cNvSpPr>
-          <p:nvPr>
-            <p:ph type="body" idx="1"/>
-          </p:nvPr>
-        </p:nvSpPr>
-        <p:spPr/>
-        <p:txBody>
-          <a:bodyPr/>
-          <a:lstStyle/>
-          <a:p>
-            <a:endParaRPr lang="en-US" dirty="0"/>
-          </a:p>
-        </p:txBody>
-      </p:sp>
-      <p:sp>
-        <p:nvSpPr>
-          <p:cNvPr id="4" name="Slide Number Placeholder 3"/>
-          <p:cNvSpPr>
-            <a:spLocks noGrp="1"/>
-          </p:cNvSpPr>
-          <p:nvPr>
-            <p:ph type="sldNum" sz="quarter" idx="10"/>
-          </p:nvPr>
-        </p:nvSpPr>
-        <p:spPr/>
-        <p:txBody>
-          <a:bodyPr/>
-          <a:lstStyle/>
-          <a:p>
-            <a:fld id="{F7021451-1387-4CA6-816F-3879F97B5CBC}" type="slidenum">
-              <a:rPr lang="en-US"/>
-              <a:t>19</a:t>
-            </a:fld>
-            <a:endParaRPr lang="en-US"/>
-          </a:p>
-        </p:txBody>
-      </p:sp>
-    </p:spTree>
-    <p:extLst>
-      <p:ext uri="{BB962C8B-B14F-4D97-AF65-F5344CB8AC3E}">
-        <p14:creationId xmlns:p14="http://schemas.microsoft.com/office/powerpoint/2010/main" val="1024086991"/>
-      </p:ext>
-    </p:extLst>
-  </p:cSld>
-  <p:clrMapOvr>
-    <a:masterClrMapping/>
-  </p:clrMapOvr>
-</p:notes>
-</file>
-
-<file path=ppt/notesSlides/notesSlide2.xml><?xml version="1.0" encoding="utf-8"?>
-<p:notes xmlns:a="http://schemas.openxmlformats.org/drawingml/2006/main" xmlns:r="http://schemas.openxmlformats.org/officeDocument/2006/relationships" xmlns:p="http://schemas.openxmlformats.org/presentationml/2006/main">
-  <p:cSld>
-    <p:spTree>
-      <p:nvGrpSpPr>
-        <p:cNvPr id="1" name=""/>
-        <p:cNvGrpSpPr/>
-        <p:nvPr/>
-      </p:nvGrpSpPr>
-      <p:grpSpPr>
-        <a:xfrm>
-          <a:off x="0" y="0"/>
-          <a:ext cx="0" cy="0"/>
-          <a:chOff x="0" y="0"/>
-          <a:chExt cx="0" cy="0"/>
-        </a:xfrm>
-      </p:grpSpPr>
-      <p:sp>
-        <p:nvSpPr>
-          <p:cNvPr id="2" name="Slide Image Placeholder 1"/>
-          <p:cNvSpPr>
-            <a:spLocks noGrp="1" noRot="1" noChangeAspect="1"/>
-          </p:cNvSpPr>
-          <p:nvPr>
-            <p:ph type="sldImg"/>
-          </p:nvPr>
-        </p:nvSpPr>
-        <p:spPr/>
-      </p:sp>
-      <p:sp>
-        <p:nvSpPr>
-          <p:cNvPr id="3" name="Notes Placeholder 2"/>
-          <p:cNvSpPr>
-            <a:spLocks noGrp="1"/>
-          </p:cNvSpPr>
-          <p:nvPr>
-            <p:ph type="body" idx="1"/>
-          </p:nvPr>
-        </p:nvSpPr>
-        <p:spPr/>
-        <p:txBody>
-          <a:bodyPr/>
-          <a:lstStyle/>
-          <a:p>
-            <a:endParaRPr lang="en-US" dirty="0"/>
-          </a:p>
-        </p:txBody>
-      </p:sp>
-      <p:sp>
-        <p:nvSpPr>
-          <p:cNvPr id="4" name="Slide Number Placeholder 3"/>
-          <p:cNvSpPr>
-            <a:spLocks noGrp="1"/>
-          </p:cNvSpPr>
-          <p:nvPr>
-            <p:ph type="sldNum" sz="quarter" idx="10"/>
-          </p:nvPr>
-        </p:nvSpPr>
-        <p:spPr/>
-        <p:txBody>
-          <a:bodyPr/>
-          <a:lstStyle/>
-          <a:p>
-            <a:fld id="{F7021451-1387-4CA6-816F-3879F97B5CBC}" type="slidenum">
-              <a:rPr lang="en-US"/>
-              <a:t>2</a:t>
-            </a:fld>
-            <a:endParaRPr lang="en-US"/>
-          </a:p>
-        </p:txBody>
-      </p:sp>
-    </p:spTree>
-    <p:extLst>
-      <p:ext uri="{BB962C8B-B14F-4D97-AF65-F5344CB8AC3E}">
-        <p14:creationId xmlns:p14="http://schemas.microsoft.com/office/powerpoint/2010/main" val="1024086991"/>
-      </p:ext>
-    </p:extLst>
-  </p:cSld>
-  <p:clrMapOvr>
-    <a:masterClrMapping/>
-  </p:clrMapOvr>
-</p:notes>
-</file>
-
-<file path=ppt/notesSlides/notesSlide20.xml><?xml version="1.0" encoding="utf-8"?>
-<p:notes xmlns:a="http://schemas.openxmlformats.org/drawingml/2006/main" xmlns:r="http://schemas.openxmlformats.org/officeDocument/2006/relationships" xmlns:p="http://schemas.openxmlformats.org/presentationml/2006/main">
-  <p:cSld>
-    <p:spTree>
-      <p:nvGrpSpPr>
-        <p:cNvPr id="1" name=""/>
-        <p:cNvGrpSpPr/>
-        <p:nvPr/>
-      </p:nvGrpSpPr>
-      <p:grpSpPr>
-        <a:xfrm>
-          <a:off x="0" y="0"/>
-          <a:ext cx="0" cy="0"/>
-          <a:chOff x="0" y="0"/>
-          <a:chExt cx="0" cy="0"/>
-        </a:xfrm>
-      </p:grpSpPr>
-      <p:sp>
-        <p:nvSpPr>
-          <p:cNvPr id="2" name="Slide Image Placeholder 1"/>
-          <p:cNvSpPr>
-            <a:spLocks noGrp="1" noRot="1" noChangeAspect="1"/>
-          </p:cNvSpPr>
-          <p:nvPr>
-            <p:ph type="sldImg"/>
-          </p:nvPr>
-        </p:nvSpPr>
-        <p:spPr/>
-      </p:sp>
-      <p:sp>
-        <p:nvSpPr>
-          <p:cNvPr id="3" name="Notes Placeholder 2"/>
-          <p:cNvSpPr>
-            <a:spLocks noGrp="1"/>
-          </p:cNvSpPr>
-          <p:nvPr>
-            <p:ph type="body" idx="1"/>
-          </p:nvPr>
-        </p:nvSpPr>
-        <p:spPr/>
-        <p:txBody>
-          <a:bodyPr/>
-          <a:lstStyle/>
-          <a:p>
-            <a:endParaRPr lang="en-US" dirty="0"/>
-          </a:p>
-        </p:txBody>
-      </p:sp>
-      <p:sp>
-        <p:nvSpPr>
-          <p:cNvPr id="4" name="Slide Number Placeholder 3"/>
-          <p:cNvSpPr>
-            <a:spLocks noGrp="1"/>
-          </p:cNvSpPr>
-          <p:nvPr>
-            <p:ph type="sldNum" sz="quarter" idx="10"/>
-          </p:nvPr>
-        </p:nvSpPr>
-        <p:spPr/>
-        <p:txBody>
-          <a:bodyPr/>
-          <a:lstStyle/>
-          <a:p>
-            <a:fld id="{F7021451-1387-4CA6-816F-3879F97B5CBC}" type="slidenum">
-              <a:rPr lang="en-US"/>
-              <a:t>20</a:t>
-            </a:fld>
-            <a:endParaRPr lang="en-US"/>
-          </a:p>
-        </p:txBody>
-      </p:sp>
-    </p:spTree>
-    <p:extLst>
-      <p:ext uri="{BB962C8B-B14F-4D97-AF65-F5344CB8AC3E}">
-        <p14:creationId xmlns:p14="http://schemas.microsoft.com/office/powerpoint/2010/main" val="1024086991"/>
-      </p:ext>
-    </p:extLst>
-  </p:cSld>
-  <p:clrMapOvr>
-    <a:masterClrMapping/>
-  </p:clrMapOvr>
-</p:notes>
-</file>
-
-<file path=ppt/notesSlides/notesSlide3.xml><?xml version="1.0" encoding="utf-8"?>
-<p:notes xmlns:a="http://schemas.openxmlformats.org/drawingml/2006/main" xmlns:r="http://schemas.openxmlformats.org/officeDocument/2006/relationships" xmlns:p="http://schemas.openxmlformats.org/presentationml/2006/main">
-  <p:cSld>
-    <p:spTree>
-      <p:nvGrpSpPr>
-        <p:cNvPr id="1" name=""/>
-        <p:cNvGrpSpPr/>
-        <p:nvPr/>
-      </p:nvGrpSpPr>
-      <p:grpSpPr>
-        <a:xfrm>
-          <a:off x="0" y="0"/>
-          <a:ext cx="0" cy="0"/>
-          <a:chOff x="0" y="0"/>
-          <a:chExt cx="0" cy="0"/>
-        </a:xfrm>
-      </p:grpSpPr>
-      <p:sp>
-        <p:nvSpPr>
-          <p:cNvPr id="2" name="Slide Image Placeholder 1"/>
-          <p:cNvSpPr>
-            <a:spLocks noGrp="1" noRot="1" noChangeAspect="1"/>
-          </p:cNvSpPr>
-          <p:nvPr>
-            <p:ph type="sldImg"/>
-          </p:nvPr>
-        </p:nvSpPr>
-        <p:spPr/>
-      </p:sp>
-      <p:sp>
-        <p:nvSpPr>
-          <p:cNvPr id="3" name="Notes Placeholder 2"/>
-          <p:cNvSpPr>
-            <a:spLocks noGrp="1"/>
-          </p:cNvSpPr>
-          <p:nvPr>
-            <p:ph type="body" idx="1"/>
-          </p:nvPr>
-        </p:nvSpPr>
-        <p:spPr/>
-        <p:txBody>
-          <a:bodyPr/>
-          <a:lstStyle/>
-          <a:p>
-            <a:endParaRPr lang="en-US" dirty="0"/>
-          </a:p>
-        </p:txBody>
-      </p:sp>
-      <p:sp>
-        <p:nvSpPr>
-          <p:cNvPr id="4" name="Slide Number Placeholder 3"/>
-          <p:cNvSpPr>
-            <a:spLocks noGrp="1"/>
-          </p:cNvSpPr>
-          <p:nvPr>
-            <p:ph type="sldNum" sz="quarter" idx="10"/>
-          </p:nvPr>
-        </p:nvSpPr>
-        <p:spPr/>
-        <p:txBody>
-          <a:bodyPr/>
-          <a:lstStyle/>
-          <a:p>
-            <a:fld id="{F7021451-1387-4CA6-816F-3879F97B5CBC}" type="slidenum">
-              <a:rPr lang="en-US"/>
-              <a:t>3</a:t>
-            </a:fld>
-            <a:endParaRPr lang="en-US"/>
-          </a:p>
-        </p:txBody>
-      </p:sp>
-    </p:spTree>
-    <p:extLst>
-      <p:ext uri="{BB962C8B-B14F-4D97-AF65-F5344CB8AC3E}">
-        <p14:creationId xmlns:p14="http://schemas.microsoft.com/office/powerpoint/2010/main" val="1024086991"/>
-      </p:ext>
-    </p:extLst>
-  </p:cSld>
-  <p:clrMapOvr>
-    <a:masterClrMapping/>
-  </p:clrMapOvr>
-</p:notes>
-</file>
-
-<file path=ppt/notesSlides/notesSlide4.xml><?xml version="1.0" encoding="utf-8"?>
-<p:notes xmlns:a="http://schemas.openxmlformats.org/drawingml/2006/main" xmlns:r="http://schemas.openxmlformats.org/officeDocument/2006/relationships" xmlns:p="http://schemas.openxmlformats.org/presentationml/2006/main">
-  <p:cSld>
-    <p:spTree>
-      <p:nvGrpSpPr>
-        <p:cNvPr id="1" name=""/>
-        <p:cNvGrpSpPr/>
-        <p:nvPr/>
-      </p:nvGrpSpPr>
-      <p:grpSpPr>
-        <a:xfrm>
-          <a:off x="0" y="0"/>
-          <a:ext cx="0" cy="0"/>
-          <a:chOff x="0" y="0"/>
-          <a:chExt cx="0" cy="0"/>
-        </a:xfrm>
-      </p:grpSpPr>
-      <p:sp>
-        <p:nvSpPr>
-          <p:cNvPr id="2" name="Slide Image Placeholder 1"/>
-          <p:cNvSpPr>
-            <a:spLocks noGrp="1" noRot="1" noChangeAspect="1"/>
-          </p:cNvSpPr>
-          <p:nvPr>
-            <p:ph type="sldImg"/>
-          </p:nvPr>
-        </p:nvSpPr>
-        <p:spPr/>
-      </p:sp>
-      <p:sp>
-        <p:nvSpPr>
-          <p:cNvPr id="3" name="Notes Placeholder 2"/>
-          <p:cNvSpPr>
-            <a:spLocks noGrp="1"/>
-          </p:cNvSpPr>
-          <p:nvPr>
-            <p:ph type="body" idx="1"/>
-          </p:nvPr>
-        </p:nvSpPr>
-        <p:spPr/>
-        <p:txBody>
-          <a:bodyPr/>
-          <a:lstStyle/>
-          <a:p>
-            <a:endParaRPr lang="en-US" dirty="0"/>
-          </a:p>
-        </p:txBody>
-      </p:sp>
-      <p:sp>
-        <p:nvSpPr>
-          <p:cNvPr id="4" name="Slide Number Placeholder 3"/>
-          <p:cNvSpPr>
-            <a:spLocks noGrp="1"/>
-          </p:cNvSpPr>
-          <p:nvPr>
-            <p:ph type="sldNum" sz="quarter" idx="10"/>
-          </p:nvPr>
-        </p:nvSpPr>
-        <p:spPr/>
-        <p:txBody>
-          <a:bodyPr/>
-          <a:lstStyle/>
-          <a:p>
-            <a:fld id="{F7021451-1387-4CA6-816F-3879F97B5CBC}" type="slidenum">
-              <a:rPr lang="en-US"/>
-              <a:t>4</a:t>
-            </a:fld>
-            <a:endParaRPr lang="en-US"/>
-          </a:p>
-        </p:txBody>
-      </p:sp>
-    </p:spTree>
-    <p:extLst>
-      <p:ext uri="{BB962C8B-B14F-4D97-AF65-F5344CB8AC3E}">
-        <p14:creationId xmlns:p14="http://schemas.microsoft.com/office/powerpoint/2010/main" val="1024086991"/>
-      </p:ext>
-    </p:extLst>
-  </p:cSld>
-  <p:clrMapOvr>
-    <a:masterClrMapping/>
-  </p:clrMapOvr>
-</p:notes>
-</file>
-
-<file path=ppt/notesSlides/notesSlide5.xml><?xml version="1.0" encoding="utf-8"?>
-<p:notes xmlns:a="http://schemas.openxmlformats.org/drawingml/2006/main" xmlns:r="http://schemas.openxmlformats.org/officeDocument/2006/relationships" xmlns:p="http://schemas.openxmlformats.org/presentationml/2006/main">
-  <p:cSld>
-    <p:spTree>
-      <p:nvGrpSpPr>
-        <p:cNvPr id="1" name=""/>
-        <p:cNvGrpSpPr/>
-        <p:nvPr/>
-      </p:nvGrpSpPr>
-      <p:grpSpPr>
-        <a:xfrm>
-          <a:off x="0" y="0"/>
-          <a:ext cx="0" cy="0"/>
-          <a:chOff x="0" y="0"/>
-          <a:chExt cx="0" cy="0"/>
-        </a:xfrm>
-      </p:grpSpPr>
-    </p:spTree>
-  </p:cSld>
-  <p:clrMapOvr>
-    <a:masterClrMapping/>
-  </p:clrMapOvr>
-</p:notes>
-</file>
-
-<file path=ppt/notesSlides/notesSlide6.xml><?xml version="1.0" encoding="utf-8"?>
-<p:notes xmlns:a="http://schemas.openxmlformats.org/drawingml/2006/main" xmlns:r="http://schemas.openxmlformats.org/officeDocument/2006/relationships" xmlns:p="http://schemas.openxmlformats.org/presentationml/2006/main">
-  <p:cSld>
-    <p:spTree>
-      <p:nvGrpSpPr>
-        <p:cNvPr id="1" name=""/>
-        <p:cNvGrpSpPr/>
-        <p:nvPr/>
-      </p:nvGrpSpPr>
-      <p:grpSpPr>
-        <a:xfrm>
-          <a:off x="0" y="0"/>
-          <a:ext cx="0" cy="0"/>
-          <a:chOff x="0" y="0"/>
-          <a:chExt cx="0" cy="0"/>
-        </a:xfrm>
-      </p:grpSpPr>
-    </p:spTree>
-  </p:cSld>
-  <p:clrMapOvr>
-    <a:masterClrMapping/>
-  </p:clrMapOvr>
-</p:notes>
-</file>
-
-<file path=ppt/notesSlides/notesSlide7.xml><?xml version="1.0" encoding="utf-8"?>
-<p:notes xmlns:a="http://schemas.openxmlformats.org/drawingml/2006/main" xmlns:r="http://schemas.openxmlformats.org/officeDocument/2006/relationships" xmlns:p="http://schemas.openxmlformats.org/presentationml/2006/main">
-  <p:cSld>
-    <p:spTree>
-      <p:nvGrpSpPr>
-        <p:cNvPr id="1" name=""/>
-        <p:cNvGrpSpPr/>
-        <p:nvPr/>
-      </p:nvGrpSpPr>
-      <p:grpSpPr>
-        <a:xfrm>
-          <a:off x="0" y="0"/>
-          <a:ext cx="0" cy="0"/>
-          <a:chOff x="0" y="0"/>
-          <a:chExt cx="0" cy="0"/>
-        </a:xfrm>
-      </p:grpSpPr>
-      <p:sp>
-        <p:nvSpPr>
-          <p:cNvPr id="2" name="Slide Image Placeholder 1"/>
-          <p:cNvSpPr>
-            <a:spLocks noGrp="1" noRot="1" noChangeAspect="1"/>
-          </p:cNvSpPr>
-          <p:nvPr>
-            <p:ph type="sldImg"/>
-          </p:nvPr>
-        </p:nvSpPr>
-        <p:spPr/>
-      </p:sp>
-      <p:sp>
-        <p:nvSpPr>
-          <p:cNvPr id="3" name="Notes Placeholder 2"/>
-          <p:cNvSpPr>
-            <a:spLocks noGrp="1"/>
-          </p:cNvSpPr>
-          <p:nvPr>
-            <p:ph type="body" idx="1"/>
-          </p:nvPr>
-        </p:nvSpPr>
-        <p:spPr/>
-        <p:txBody>
-          <a:bodyPr/>
-          <a:lstStyle/>
-          <a:p>
-            <a:endParaRPr lang="en-US" dirty="0"/>
-          </a:p>
-        </p:txBody>
-      </p:sp>
-      <p:sp>
-        <p:nvSpPr>
-          <p:cNvPr id="4" name="Slide Number Placeholder 3"/>
-          <p:cNvSpPr>
-            <a:spLocks noGrp="1"/>
-          </p:cNvSpPr>
-          <p:nvPr>
-            <p:ph type="sldNum" sz="quarter" idx="10"/>
-          </p:nvPr>
-        </p:nvSpPr>
-        <p:spPr/>
-        <p:txBody>
-          <a:bodyPr/>
-          <a:lstStyle/>
-          <a:p>
-            <a:fld id="{F7021451-1387-4CA6-816F-3879F97B5CBC}" type="slidenum">
-              <a:rPr lang="en-US"/>
-              <a:t>7</a:t>
-            </a:fld>
-            <a:endParaRPr lang="en-US"/>
-          </a:p>
-        </p:txBody>
-      </p:sp>
-    </p:spTree>
-    <p:extLst>
-      <p:ext uri="{BB962C8B-B14F-4D97-AF65-F5344CB8AC3E}">
-        <p14:creationId xmlns:p14="http://schemas.microsoft.com/office/powerpoint/2010/main" val="1024086991"/>
-      </p:ext>
-    </p:extLst>
-  </p:cSld>
-  <p:clrMapOvr>
-    <a:masterClrMapping/>
-  </p:clrMapOvr>
-</p:notes>
-</file>
-
-<file path=ppt/notesSlides/notesSlide8.xml><?xml version="1.0" encoding="utf-8"?>
-<p:notes xmlns:a="http://schemas.openxmlformats.org/drawingml/2006/main" xmlns:r="http://schemas.openxmlformats.org/officeDocument/2006/relationships" xmlns:p="http://schemas.openxmlformats.org/presentationml/2006/main">
-  <p:cSld>
-    <p:spTree>
-      <p:nvGrpSpPr>
-        <p:cNvPr id="1" name="">
-          <a:extLst>
-            <a:ext uri="{FF2B5EF4-FFF2-40B4-BE49-F238E27FC236}">
-              <a16:creationId xmlns:a16="http://schemas.microsoft.com/office/drawing/2014/main" id="{9CEB5837-680B-1921-73FF-8624E26371C2}"/>
-            </a:ext>
-          </a:extLst>
-        </p:cNvPr>
-        <p:cNvGrpSpPr/>
-        <p:nvPr/>
-      </p:nvGrpSpPr>
-      <p:grpSpPr>
-        <a:xfrm>
-          <a:off x="0" y="0"/>
-          <a:ext cx="0" cy="0"/>
-          <a:chOff x="0" y="0"/>
-          <a:chExt cx="0" cy="0"/>
-        </a:xfrm>
-      </p:grpSpPr>
-    </p:spTree>
-    <p:extLst>
-      <p:ext uri="{BB962C8B-B14F-4D97-AF65-F5344CB8AC3E}">
-        <p14:creationId xmlns:p14="http://schemas.microsoft.com/office/powerpoint/2010/main" val="1121133579"/>
-      </p:ext>
-    </p:extLst>
-  </p:cSld>
-  <p:clrMapOvr>
-    <a:masterClrMapping/>
-  </p:clrMapOvr>
-</p:notes>
-</file>
-
-<file path=ppt/notesSlides/notesSlide9.xml><?xml version="1.0" encoding="utf-8"?>
-<p:notes xmlns:a="http://schemas.openxmlformats.org/drawingml/2006/main" xmlns:r="http://schemas.openxmlformats.org/officeDocument/2006/relationships" xmlns:p="http://schemas.openxmlformats.org/presentationml/2006/main">
-  <p:cSld>
-    <p:spTree>
-      <p:nvGrpSpPr>
-        <p:cNvPr id="1" name=""/>
-        <p:cNvGrpSpPr/>
-        <p:nvPr/>
-      </p:nvGrpSpPr>
-      <p:grpSpPr>
-        <a:xfrm>
-          <a:off x="0" y="0"/>
-          <a:ext cx="0" cy="0"/>
-          <a:chOff x="0" y="0"/>
-          <a:chExt cx="0" cy="0"/>
-        </a:xfrm>
-      </p:grpSpPr>
-      <p:sp>
-        <p:nvSpPr>
-          <p:cNvPr id="2" name="Slide Image Placeholder 1"/>
-          <p:cNvSpPr>
-            <a:spLocks noGrp="1" noRot="1" noChangeAspect="1"/>
-          </p:cNvSpPr>
-          <p:nvPr>
-            <p:ph type="sldImg"/>
-          </p:nvPr>
-        </p:nvSpPr>
-        <p:spPr/>
-      </p:sp>
-      <p:sp>
-        <p:nvSpPr>
-          <p:cNvPr id="3" name="Notes Placeholder 2"/>
-          <p:cNvSpPr>
-            <a:spLocks noGrp="1"/>
-          </p:cNvSpPr>
-          <p:nvPr>
-            <p:ph type="body" idx="1"/>
-          </p:nvPr>
-        </p:nvSpPr>
-        <p:spPr/>
-        <p:txBody>
-          <a:bodyPr/>
-          <a:lstStyle/>
-          <a:p>
-            <a:endParaRPr lang="en-US" dirty="0"/>
-          </a:p>
-        </p:txBody>
-      </p:sp>
-      <p:sp>
-        <p:nvSpPr>
-          <p:cNvPr id="4" name="Slide Number Placeholder 3"/>
-          <p:cNvSpPr>
-            <a:spLocks noGrp="1"/>
-          </p:cNvSpPr>
-          <p:nvPr>
-            <p:ph type="sldNum" sz="quarter" idx="10"/>
-          </p:nvPr>
-        </p:nvSpPr>
-        <p:spPr/>
-        <p:txBody>
-          <a:bodyPr/>
-          <a:lstStyle/>
-          <a:p>
-            <a:fld id="{F7021451-1387-4CA6-816F-3879F97B5CBC}" type="slidenum">
-              <a:rPr lang="en-US"/>
-              <a:t>9</a:t>
-            </a:fld>
-            <a:endParaRPr lang="en-US"/>
-          </a:p>
-        </p:txBody>
-      </p:sp>
-    </p:spTree>
-    <p:extLst>
-      <p:ext uri="{BB962C8B-B14F-4D97-AF65-F5344CB8AC3E}">
-        <p14:creationId xmlns:p14="http://schemas.microsoft.com/office/powerpoint/2010/main" val="1024086991"/>
-      </p:ext>
-    </p:extLst>
-  </p:cSld>
-  <p:clrMapOvr>
-    <a:masterClrMapping/>
-  </p:clrMapOvr>
-</p:notes>
-</file>
-
-<file path=ppt/slideLayouts/slideLayout1.xml><?xml version="1.0" encoding="utf-8"?>
+<file path=ppt\slideLayouts\slideLayout1.xml><?xml version="1.0" encoding="utf-8"?>
 <p:sldLayout xmlns:a="http://schemas.openxmlformats.org/drawingml/2006/main" xmlns:r="http://schemas.openxmlformats.org/officeDocument/2006/relationships" xmlns:p="http://schemas.openxmlformats.org/presentationml/2006/main" preserve="1">
   <p:cSld name="DEFAULT">
     <p:bg>
@@ -1848,7 +1963,7 @@
 </p:sldLayout>
 </file>
 
-<file path=ppt/slideMasters/slideMaster1.xml><?xml version="1.0" encoding="utf-8"?>
+<file path=ppt\slideMasters\slideMaster1.xml><?xml version="1.0" encoding="utf-8"?>
 <p:sldMaster xmlns:a="http://schemas.openxmlformats.org/drawingml/2006/main" xmlns:r="http://schemas.openxmlformats.org/officeDocument/2006/relationships" xmlns:p="http://schemas.openxmlformats.org/presentationml/2006/main">
   <p:cSld>
     <p:bg>
@@ -2130,7 +2245,7 @@
 </p:sldMaster>
 </file>
 
-<file path=ppt/slides/slide1.xml><?xml version="1.0" encoding="utf-8"?>
+<file path=ppt\slides\slide1.xml><?xml version="1.0" encoding="utf-8"?>
 <p:sld xmlns:a="http://schemas.openxmlformats.org/drawingml/2006/main" xmlns:r="http://schemas.openxmlformats.org/officeDocument/2006/relationships" xmlns:p="http://schemas.openxmlformats.org/presentationml/2006/main">
   <p:cSld name="Slide 1">
     <p:bg>
@@ -5117,7 +5232,7 @@
 </p:sld>
 </file>
 
-<file path=ppt/slides/slide10.xml><?xml version="1.0" encoding="utf-8"?>
+<file path=ppt\slides\slide10.xml><?xml version="1.0" encoding="utf-8"?>
 <p:sld xmlns:a="http://schemas.openxmlformats.org/drawingml/2006/main" xmlns:r="http://schemas.openxmlformats.org/officeDocument/2006/relationships" xmlns:p="http://schemas.openxmlformats.org/presentationml/2006/main">
   <p:cSld name="Slide 7">
     <p:bg>
@@ -5892,7 +6007,7 @@
 </p:sld>
 </file>
 
-<file path=ppt/slides/slide11.xml><?xml version="1.0" encoding="utf-8"?>
+<file path=ppt\slides\slide11.xml><?xml version="1.0" encoding="utf-8"?>
 <p:sld xmlns:a="http://schemas.openxmlformats.org/drawingml/2006/main" xmlns:r="http://schemas.openxmlformats.org/officeDocument/2006/relationships" xmlns:p="http://schemas.openxmlformats.org/presentationml/2006/main">
   <p:cSld>
     <p:bg>
@@ -5997,7 +6112,7 @@
 </p:sld>
 </file>
 
-<file path=ppt/slides/slide12.xml><?xml version="1.0" encoding="utf-8"?>
+<file path=ppt\slides\slide12.xml><?xml version="1.0" encoding="utf-8"?>
 <p:sld xmlns:a="http://schemas.openxmlformats.org/drawingml/2006/main" xmlns:r="http://schemas.openxmlformats.org/officeDocument/2006/relationships" xmlns:p="http://schemas.openxmlformats.org/presentationml/2006/main">
   <p:cSld>
     <p:bg>
@@ -6102,7 +6217,7 @@
 </p:sld>
 </file>
 
-<file path=ppt/slides/slide13.xml><?xml version="1.0" encoding="utf-8"?>
+<file path=ppt\slides\slide13.xml><?xml version="1.0" encoding="utf-8"?>
 <p:sld xmlns:a="http://schemas.openxmlformats.org/drawingml/2006/main" xmlns:r="http://schemas.openxmlformats.org/officeDocument/2006/relationships" xmlns:p="http://schemas.openxmlformats.org/presentationml/2006/main">
   <p:cSld name="Slide 8">
     <p:bg>
@@ -7149,7 +7264,7 @@
 </p:sld>
 </file>
 
-<file path=ppt/slides/slide14.xml><?xml version="1.0" encoding="utf-8"?>
+<file path=ppt\slides\slide14.xml><?xml version="1.0" encoding="utf-8"?>
 <p:sld xmlns:a="http://schemas.openxmlformats.org/drawingml/2006/main" xmlns:r="http://schemas.openxmlformats.org/officeDocument/2006/relationships" xmlns:p="http://schemas.openxmlformats.org/presentationml/2006/main">
   <p:cSld name="Slide 9">
     <p:bg>
@@ -7321,7 +7436,7 @@
                 <a:ea typeface="Courier New" pitchFamily="34" charset="-122"/>
                 <a:cs typeface="Courier New" pitchFamily="34" charset="-120"/>
               </a:rPr>
-              <a:t>🔗  techop.vercel.app</a:t>
+              <a:t>🔗  techshopge.vercel.app</a:t>
             </a:r>
             <a:endParaRPr lang="en-US" sz="1100" dirty="0"/>
           </a:p>
@@ -8033,7 +8148,7 @@
 </p:sld>
 </file>
 
-<file path=ppt/slides/slide15.xml><?xml version="1.0" encoding="utf-8"?>
+<file path=ppt\slides\slide15.xml><?xml version="1.0" encoding="utf-8"?>
 <p:sld xmlns:a="http://schemas.openxmlformats.org/drawingml/2006/main" xmlns:r="http://schemas.openxmlformats.org/officeDocument/2006/relationships" xmlns:p="http://schemas.openxmlformats.org/presentationml/2006/main">
   <p:cSld name="Slide 10">
     <p:bg>
@@ -9507,7 +9622,7 @@
 </p:sld>
 </file>
 
-<file path=ppt/slides/slide16.xml><?xml version="1.0" encoding="utf-8"?>
+<file path=ppt\slides\slide16.xml><?xml version="1.0" encoding="utf-8"?>
 <p:sld xmlns:a="http://schemas.openxmlformats.org/drawingml/2006/main" xmlns:r="http://schemas.openxmlformats.org/officeDocument/2006/relationships" xmlns:p="http://schemas.openxmlformats.org/presentationml/2006/main">
   <p:cSld name="Slide 11">
     <p:bg>
@@ -10535,7 +10650,7 @@
 </p:sld>
 </file>
 
-<file path=ppt/slides/slide17.xml><?xml version="1.0" encoding="utf-8"?>
+<file path=ppt\slides\slide17.xml><?xml version="1.0" encoding="utf-8"?>
 <p:sld xmlns:a="http://schemas.openxmlformats.org/drawingml/2006/main" xmlns:r="http://schemas.openxmlformats.org/officeDocument/2006/relationships" xmlns:p="http://schemas.openxmlformats.org/presentationml/2006/main">
   <p:cSld name="Slide 13">
     <p:bg>
@@ -12093,7 +12208,7 @@
 </p:sld>
 </file>
 
-<file path=ppt/slides/slide18.xml><?xml version="1.0" encoding="utf-8"?>
+<file path=ppt\slides\slide18.xml><?xml version="1.0" encoding="utf-8"?>
 <p:sld xmlns:a="http://schemas.openxmlformats.org/drawingml/2006/main" xmlns:r="http://schemas.openxmlformats.org/officeDocument/2006/relationships" xmlns:p="http://schemas.openxmlformats.org/presentationml/2006/main">
   <p:cSld name="Slide 12">
     <p:bg>
@@ -12844,7 +12959,7 @@
 </p:sld>
 </file>
 
-<file path=ppt/slides/slide19.xml><?xml version="1.0" encoding="utf-8"?>
+<file path=ppt\slides\slide19.xml><?xml version="1.0" encoding="utf-8"?>
 <p:sld xmlns:a="http://schemas.openxmlformats.org/drawingml/2006/main" xmlns:r="http://schemas.openxmlformats.org/officeDocument/2006/relationships" xmlns:p="http://schemas.openxmlformats.org/presentationml/2006/main">
   <p:cSld name="Slide 14">
     <p:bg>
@@ -13623,7 +13738,7 @@
 </p:sld>
 </file>
 
-<file path=ppt/slides/slide2.xml><?xml version="1.0" encoding="utf-8"?>
+<file path=ppt\slides\slide2.xml><?xml version="1.0" encoding="utf-8"?>
 <p:sld xmlns:a="http://schemas.openxmlformats.org/drawingml/2006/main" xmlns:r="http://schemas.openxmlformats.org/officeDocument/2006/relationships" xmlns:p="http://schemas.openxmlformats.org/presentationml/2006/main">
   <p:cSld name="Slide 2">
     <p:bg>
@@ -14980,7 +15095,7 @@
 </p:sld>
 </file>
 
-<file path=ppt/slides/slide20.xml><?xml version="1.0" encoding="utf-8"?>
+<file path=ppt\slides\slide20.xml><?xml version="1.0" encoding="utf-8"?>
 <p:sld xmlns:a="http://schemas.openxmlformats.org/drawingml/2006/main" xmlns:r="http://schemas.openxmlformats.org/officeDocument/2006/relationships" xmlns:p="http://schemas.openxmlformats.org/presentationml/2006/main">
   <p:cSld name="Slide 15">
     <p:bg>
@@ -17721,7 +17836,7 @@
                 <a:ea typeface="Courier New" pitchFamily="34" charset="-122"/>
                 <a:cs typeface="Courier New" pitchFamily="34" charset="-120"/>
               </a:rPr>
-              <a:t>🔗  techop.vercel.app</a:t>
+              <a:t>🔗  techshopge.vercel.app</a:t>
             </a:r>
             <a:endParaRPr lang="en-US" sz="1400" dirty="0"/>
           </a:p>
@@ -17836,7 +17951,7 @@
 </p:sld>
 </file>
 
-<file path=ppt/slides/slide3.xml><?xml version="1.0" encoding="utf-8"?>
+<file path=ppt\slides\slide3.xml><?xml version="1.0" encoding="utf-8"?>
 <p:sld xmlns:a="http://schemas.openxmlformats.org/drawingml/2006/main" xmlns:r="http://schemas.openxmlformats.org/officeDocument/2006/relationships" xmlns:p="http://schemas.openxmlformats.org/presentationml/2006/main">
   <p:cSld name="Slide 3">
     <p:bg>
@@ -18413,7 +18528,7 @@
 </p:sld>
 </file>
 
-<file path=ppt/slides/slide4.xml><?xml version="1.0" encoding="utf-8"?>
+<file path=ppt\slides\slide4.xml><?xml version="1.0" encoding="utf-8"?>
 <p:sld xmlns:a="http://schemas.openxmlformats.org/drawingml/2006/main" xmlns:r="http://schemas.openxmlformats.org/officeDocument/2006/relationships" xmlns:p="http://schemas.openxmlformats.org/presentationml/2006/main">
   <p:cSld name="Slide 4">
     <p:bg>
@@ -19425,7 +19540,7 @@
 </p:sld>
 </file>
 
-<file path=ppt/slides/slide5.xml><?xml version="1.0" encoding="utf-8"?>
+<file path=ppt\slides\slide5.xml><?xml version="1.0" encoding="utf-8"?>
 <p:sld xmlns:a="http://schemas.openxmlformats.org/drawingml/2006/main" xmlns:r="http://schemas.openxmlformats.org/officeDocument/2006/relationships" xmlns:p="http://schemas.openxmlformats.org/presentationml/2006/main">
   <p:cSld name="Slide 1">
     <p:bg>
@@ -21049,7 +21164,7 @@
 </p:sld>
 </file>
 
-<file path=ppt/slides/slide6.xml><?xml version="1.0" encoding="utf-8"?>
+<file path=ppt\slides\slide6.xml><?xml version="1.0" encoding="utf-8"?>
 <p:sld xmlns:a="http://schemas.openxmlformats.org/drawingml/2006/main" xmlns:r="http://schemas.openxmlformats.org/officeDocument/2006/relationships" xmlns:p="http://schemas.openxmlformats.org/presentationml/2006/main">
   <p:cSld>
     <p:bg>
@@ -23313,7 +23428,7 @@
 </p:sld>
 </file>
 
-<file path=ppt/slides/slide7.xml><?xml version="1.0" encoding="utf-8"?>
+<file path=ppt\slides\slide7.xml><?xml version="1.0" encoding="utf-8"?>
 <p:sld xmlns:a="http://schemas.openxmlformats.org/drawingml/2006/main" xmlns:r="http://schemas.openxmlformats.org/officeDocument/2006/relationships" xmlns:p="http://schemas.openxmlformats.org/presentationml/2006/main">
   <p:cSld name="Slide 5">
     <p:bg>
@@ -24105,7 +24220,7 @@
 </p:sld>
 </file>
 
-<file path=ppt/slides/slide8.xml><?xml version="1.0" encoding="utf-8"?>
+<file path=ppt\slides\slide8.xml><?xml version="1.0" encoding="utf-8"?>
 <p:sld xmlns:a="http://schemas.openxmlformats.org/drawingml/2006/main" xmlns:r="http://schemas.openxmlformats.org/officeDocument/2006/relationships" xmlns:p="http://schemas.openxmlformats.org/presentationml/2006/main">
   <p:cSld>
     <p:bg>
@@ -26325,7 +26440,7 @@
 </p:sld>
 </file>
 
-<file path=ppt/slides/slide9.xml><?xml version="1.0" encoding="utf-8"?>
+<file path=ppt\slides\slide9.xml><?xml version="1.0" encoding="utf-8"?>
 <p:sld xmlns:a="http://schemas.openxmlformats.org/drawingml/2006/main" xmlns:r="http://schemas.openxmlformats.org/officeDocument/2006/relationships" xmlns:p="http://schemas.openxmlformats.org/presentationml/2006/main">
   <p:cSld name="Slide 6">
     <p:bg>
@@ -27391,7 +27506,11 @@
 </p:sld>
 </file>
 
-<file path=ppt/theme/theme1.xml><?xml version="1.0" encoding="utf-8"?>
+<file path=ppt\tableStyles.xml><?xml version="1.0" encoding="utf-8"?>
+<a:tblStyleLst xmlns:a="http://schemas.openxmlformats.org/drawingml/2006/main" def="{5C22544A-7EE6-4342-B048-85BDC9FD1C3A}"/>
+</file>
+
+<file path=ppt\theme\theme1.xml><?xml version="1.0" encoding="utf-8"?>
 <a:theme xmlns:a="http://schemas.openxmlformats.org/drawingml/2006/main" name="Office Theme">
   <a:themeElements>
     <a:clrScheme name="Office">
@@ -27686,7 +27805,7 @@
 </a:theme>
 </file>
 
-<file path=ppt/theme/theme2.xml><?xml version="1.0" encoding="utf-8"?>
+<file path=ppt\theme\theme2.xml><?xml version="1.0" encoding="utf-8"?>
 <a:theme xmlns:a="http://schemas.openxmlformats.org/drawingml/2006/main" name="Office Theme">
   <a:themeElements>
     <a:clrScheme name="Office">
@@ -27979,4 +28098,35 @@
     </a:ext>
   </a:extLst>
 </a:theme>
+</file>
+
+<file path=ppt\viewProps.xml><?xml version="1.0" encoding="utf-8"?>
+<p:viewPr xmlns:a="http://schemas.openxmlformats.org/drawingml/2006/main" xmlns:r="http://schemas.openxmlformats.org/officeDocument/2006/relationships" xmlns:p="http://schemas.openxmlformats.org/presentationml/2006/main" lastView="sldThumbnailView">
+  <p:normalViewPr horzBarState="maximized">
+    <p:restoredLeft sz="14996" autoAdjust="0"/>
+    <p:restoredTop sz="94610"/>
+  </p:normalViewPr>
+  <p:slideViewPr>
+    <p:cSldViewPr snapToGrid="0" snapToObjects="1">
+      <p:cViewPr varScale="1">
+        <p:scale>
+          <a:sx n="127" d="100"/>
+          <a:sy n="127" d="100"/>
+        </p:scale>
+        <p:origin x="652" y="80"/>
+      </p:cViewPr>
+      <p:guideLst/>
+    </p:cSldViewPr>
+  </p:slideViewPr>
+  <p:notesTextViewPr>
+    <p:cViewPr>
+      <p:scale>
+        <a:sx n="1" d="1"/>
+        <a:sy n="1" d="1"/>
+      </p:scale>
+      <p:origin x="0" y="0"/>
+    </p:cViewPr>
+  </p:notesTextViewPr>
+  <p:gridSpacing cx="76200" cy="76200"/>
+</p:viewPr>
 </file>